--- a/livrables/01_Presentation/Presentation_SOUTENANCE.pptx
+++ b/livrables/01_Presentation/Presentation_SOUTENANCE.pptx
@@ -5,33 +5,33 @@
     <p:sldMasterId id="2147483648" r:id="rId1"/>
   </p:sldMasterIdLst>
   <p:sldIdLst>
-    <p:sldId id="256" r:id="rId7"/>
-    <p:sldId id="257" r:id="rId8"/>
-    <p:sldId id="258" r:id="rId9"/>
-    <p:sldId id="259" r:id="rId10"/>
-    <p:sldId id="260" r:id="rId11"/>
-    <p:sldId id="261" r:id="rId12"/>
-    <p:sldId id="262" r:id="rId13"/>
-    <p:sldId id="263" r:id="rId14"/>
-    <p:sldId id="264" r:id="rId15"/>
-    <p:sldId id="265" r:id="rId16"/>
-    <p:sldId id="266" r:id="rId17"/>
-    <p:sldId id="267" r:id="rId18"/>
-    <p:sldId id="268" r:id="rId19"/>
-    <p:sldId id="269" r:id="rId20"/>
-    <p:sldId id="270" r:id="rId21"/>
-    <p:sldId id="271" r:id="rId22"/>
-    <p:sldId id="272" r:id="rId23"/>
-    <p:sldId id="273" r:id="rId24"/>
-    <p:sldId id="274" r:id="rId25"/>
-    <p:sldId id="275" r:id="rId26"/>
-    <p:sldId id="276" r:id="rId27"/>
-    <p:sldId id="277" r:id="rId28"/>
-    <p:sldId id="278" r:id="rId29"/>
-    <p:sldId id="279" r:id="rId30"/>
-    <p:sldId id="280" r:id="rId31"/>
+    <p:sldId id="256" r:id="rId2"/>
+    <p:sldId id="257" r:id="rId3"/>
+    <p:sldId id="258" r:id="rId4"/>
+    <p:sldId id="259" r:id="rId5"/>
+    <p:sldId id="260" r:id="rId6"/>
+    <p:sldId id="261" r:id="rId7"/>
+    <p:sldId id="262" r:id="rId8"/>
+    <p:sldId id="263" r:id="rId9"/>
+    <p:sldId id="264" r:id="rId10"/>
+    <p:sldId id="265" r:id="rId11"/>
+    <p:sldId id="266" r:id="rId12"/>
+    <p:sldId id="267" r:id="rId13"/>
+    <p:sldId id="268" r:id="rId14"/>
+    <p:sldId id="269" r:id="rId15"/>
+    <p:sldId id="270" r:id="rId16"/>
+    <p:sldId id="271" r:id="rId17"/>
+    <p:sldId id="272" r:id="rId18"/>
+    <p:sldId id="273" r:id="rId19"/>
+    <p:sldId id="274" r:id="rId20"/>
+    <p:sldId id="275" r:id="rId21"/>
+    <p:sldId id="276" r:id="rId22"/>
+    <p:sldId id="277" r:id="rId23"/>
+    <p:sldId id="278" r:id="rId24"/>
+    <p:sldId id="279" r:id="rId25"/>
+    <p:sldId id="280" r:id="rId26"/>
   </p:sldIdLst>
-  <p:sldSz cx="12191695" cy="6858000" type="screen4x3"/>
+  <p:sldSz cx="12192000" cy="6858000"/>
   <p:notesSz cx="6858000" cy="9144000"/>
   <p:defaultTextStyle>
     <a:defPPr>
@@ -128,6 +128,22 @@
       </a:defRPr>
     </a:lvl9pPr>
   </p:defaultTextStyle>
+  <p:extLst>
+    <p:ext uri="{EFAFB233-063F-42B5-8137-9DF3F51BA10A}">
+      <p15:sldGuideLst xmlns:p15="http://schemas.microsoft.com/office/powerpoint/2012/main">
+        <p15:guide id="1" orient="horz" pos="2160">
+          <p15:clr>
+            <a:srgbClr val="A4A3A4"/>
+          </p15:clr>
+        </p15:guide>
+        <p15:guide id="2" pos="2880">
+          <p15:clr>
+            <a:srgbClr val="A4A3A4"/>
+          </p15:clr>
+        </p15:guide>
+      </p15:sldGuideLst>
+    </p:ext>
+  </p:extLst>
 </p:presentation>
 </file>
 
@@ -169,10 +185,9 @@
           <a:lstStyle/>
           <a:p>
             <a:r>
-              <a:rPr lang="en-US" smtClean="0"/>
+              <a:rPr lang="en-US"/>
               <a:t>Click to edit Master title style</a:t>
             </a:r>
-            <a:endParaRPr lang="en-US"/>
           </a:p>
         </p:txBody>
       </p:sp>
@@ -288,10 +303,9 @@
           </a:lstStyle>
           <a:p>
             <a:r>
-              <a:rPr lang="en-US" smtClean="0"/>
+              <a:rPr lang="en-US"/>
               <a:t>Click to edit Master subtitle style</a:t>
             </a:r>
-            <a:endParaRPr lang="en-US"/>
           </a:p>
         </p:txBody>
       </p:sp>
@@ -312,7 +326,7 @@
           <a:p>
             <a:fld id="{5BCAD085-E8A6-8845-BD4E-CB4CCA059FC4}" type="datetimeFigureOut">
               <a:rPr lang="en-US" smtClean="0"/>
-              <a:t>1/27/13</a:t>
+              <a:t>5/15/2026</a:t>
             </a:fld>
             <a:endParaRPr lang="en-US"/>
           </a:p>
@@ -354,7 +368,7 @@
           <a:p>
             <a:fld id="{C1FF6DA9-008F-8B48-92A6-B652298478BF}" type="slidenum">
               <a:rPr lang="en-US" smtClean="0"/>
-              <a:t>‹#›</a:t>
+              <a:t>‹N°›</a:t>
             </a:fld>
             <a:endParaRPr lang="en-US"/>
           </a:p>
@@ -406,10 +420,9 @@
           <a:lstStyle/>
           <a:p>
             <a:r>
-              <a:rPr lang="en-US" smtClean="0"/>
+              <a:rPr lang="en-US"/>
               <a:t>Click to edit Master title style</a:t>
             </a:r>
-            <a:endParaRPr lang="en-US"/>
           </a:p>
         </p:txBody>
       </p:sp>
@@ -430,38 +443,37 @@
           <a:p>
             <a:pPr lvl="0"/>
             <a:r>
-              <a:rPr lang="en-US" smtClean="0"/>
+              <a:rPr lang="en-US"/>
               <a:t>Click to edit Master text styles</a:t>
             </a:r>
           </a:p>
           <a:p>
             <a:pPr lvl="1"/>
             <a:r>
-              <a:rPr lang="en-US" smtClean="0"/>
+              <a:rPr lang="en-US"/>
               <a:t>Second level</a:t>
             </a:r>
           </a:p>
           <a:p>
             <a:pPr lvl="2"/>
             <a:r>
-              <a:rPr lang="en-US" smtClean="0"/>
+              <a:rPr lang="en-US"/>
               <a:t>Third level</a:t>
             </a:r>
           </a:p>
           <a:p>
             <a:pPr lvl="3"/>
             <a:r>
-              <a:rPr lang="en-US" smtClean="0"/>
+              <a:rPr lang="en-US"/>
               <a:t>Fourth level</a:t>
             </a:r>
           </a:p>
           <a:p>
             <a:pPr lvl="4"/>
             <a:r>
-              <a:rPr lang="en-US" smtClean="0"/>
+              <a:rPr lang="en-US"/>
               <a:t>Fifth level</a:t>
             </a:r>
-            <a:endParaRPr lang="en-US"/>
           </a:p>
         </p:txBody>
       </p:sp>
@@ -482,7 +494,7 @@
           <a:p>
             <a:fld id="{5BCAD085-E8A6-8845-BD4E-CB4CCA059FC4}" type="datetimeFigureOut">
               <a:rPr lang="en-US" smtClean="0"/>
-              <a:t>1/27/13</a:t>
+              <a:t>5/15/2026</a:t>
             </a:fld>
             <a:endParaRPr lang="en-US"/>
           </a:p>
@@ -524,7 +536,7 @@
           <a:p>
             <a:fld id="{C1FF6DA9-008F-8B48-92A6-B652298478BF}" type="slidenum">
               <a:rPr lang="en-US" smtClean="0"/>
-              <a:t>‹#›</a:t>
+              <a:t>‹N°›</a:t>
             </a:fld>
             <a:endParaRPr lang="en-US"/>
           </a:p>
@@ -581,10 +593,9 @@
           <a:lstStyle/>
           <a:p>
             <a:r>
-              <a:rPr lang="en-US" smtClean="0"/>
+              <a:rPr lang="en-US"/>
               <a:t>Click to edit Master title style</a:t>
             </a:r>
-            <a:endParaRPr lang="en-US"/>
           </a:p>
         </p:txBody>
       </p:sp>
@@ -610,38 +621,37 @@
           <a:p>
             <a:pPr lvl="0"/>
             <a:r>
-              <a:rPr lang="en-US" smtClean="0"/>
+              <a:rPr lang="en-US"/>
               <a:t>Click to edit Master text styles</a:t>
             </a:r>
           </a:p>
           <a:p>
             <a:pPr lvl="1"/>
             <a:r>
-              <a:rPr lang="en-US" smtClean="0"/>
+              <a:rPr lang="en-US"/>
               <a:t>Second level</a:t>
             </a:r>
           </a:p>
           <a:p>
             <a:pPr lvl="2"/>
             <a:r>
-              <a:rPr lang="en-US" smtClean="0"/>
+              <a:rPr lang="en-US"/>
               <a:t>Third level</a:t>
             </a:r>
           </a:p>
           <a:p>
             <a:pPr lvl="3"/>
             <a:r>
-              <a:rPr lang="en-US" smtClean="0"/>
+              <a:rPr lang="en-US"/>
               <a:t>Fourth level</a:t>
             </a:r>
           </a:p>
           <a:p>
             <a:pPr lvl="4"/>
             <a:r>
-              <a:rPr lang="en-US" smtClean="0"/>
+              <a:rPr lang="en-US"/>
               <a:t>Fifth level</a:t>
             </a:r>
-            <a:endParaRPr lang="en-US"/>
           </a:p>
         </p:txBody>
       </p:sp>
@@ -662,7 +672,7 @@
           <a:p>
             <a:fld id="{5BCAD085-E8A6-8845-BD4E-CB4CCA059FC4}" type="datetimeFigureOut">
               <a:rPr lang="en-US" smtClean="0"/>
-              <a:t>1/27/13</a:t>
+              <a:t>5/15/2026</a:t>
             </a:fld>
             <a:endParaRPr lang="en-US"/>
           </a:p>
@@ -704,7 +714,7 @@
           <a:p>
             <a:fld id="{C1FF6DA9-008F-8B48-92A6-B652298478BF}" type="slidenum">
               <a:rPr lang="en-US" smtClean="0"/>
-              <a:t>‹#›</a:t>
+              <a:t>‹N°›</a:t>
             </a:fld>
             <a:endParaRPr lang="en-US"/>
           </a:p>
@@ -756,10 +766,9 @@
           <a:lstStyle/>
           <a:p>
             <a:r>
-              <a:rPr lang="en-US" smtClean="0"/>
+              <a:rPr lang="en-US"/>
               <a:t>Click to edit Master title style</a:t>
             </a:r>
-            <a:endParaRPr lang="en-US"/>
           </a:p>
         </p:txBody>
       </p:sp>
@@ -780,38 +789,37 @@
           <a:p>
             <a:pPr lvl="0"/>
             <a:r>
-              <a:rPr lang="en-US" smtClean="0"/>
+              <a:rPr lang="en-US"/>
               <a:t>Click to edit Master text styles</a:t>
             </a:r>
           </a:p>
           <a:p>
             <a:pPr lvl="1"/>
             <a:r>
-              <a:rPr lang="en-US" smtClean="0"/>
+              <a:rPr lang="en-US"/>
               <a:t>Second level</a:t>
             </a:r>
           </a:p>
           <a:p>
             <a:pPr lvl="2"/>
             <a:r>
-              <a:rPr lang="en-US" smtClean="0"/>
+              <a:rPr lang="en-US"/>
               <a:t>Third level</a:t>
             </a:r>
           </a:p>
           <a:p>
             <a:pPr lvl="3"/>
             <a:r>
-              <a:rPr lang="en-US" smtClean="0"/>
+              <a:rPr lang="en-US"/>
               <a:t>Fourth level</a:t>
             </a:r>
           </a:p>
           <a:p>
             <a:pPr lvl="4"/>
             <a:r>
-              <a:rPr lang="en-US" smtClean="0"/>
+              <a:rPr lang="en-US"/>
               <a:t>Fifth level</a:t>
             </a:r>
-            <a:endParaRPr lang="en-US"/>
           </a:p>
         </p:txBody>
       </p:sp>
@@ -832,7 +840,7 @@
           <a:p>
             <a:fld id="{5BCAD085-E8A6-8845-BD4E-CB4CCA059FC4}" type="datetimeFigureOut">
               <a:rPr lang="en-US" smtClean="0"/>
-              <a:t>1/27/13</a:t>
+              <a:t>5/15/2026</a:t>
             </a:fld>
             <a:endParaRPr lang="en-US"/>
           </a:p>
@@ -874,7 +882,7 @@
           <a:p>
             <a:fld id="{C1FF6DA9-008F-8B48-92A6-B652298478BF}" type="slidenum">
               <a:rPr lang="en-US" smtClean="0"/>
-              <a:t>‹#›</a:t>
+              <a:t>‹N°›</a:t>
             </a:fld>
             <a:endParaRPr lang="en-US"/>
           </a:p>
@@ -935,10 +943,9 @@
           </a:lstStyle>
           <a:p>
             <a:r>
-              <a:rPr lang="en-US" smtClean="0"/>
+              <a:rPr lang="en-US"/>
               <a:t>Click to edit Master title style</a:t>
             </a:r>
-            <a:endParaRPr lang="en-US"/>
           </a:p>
         </p:txBody>
       </p:sp>
@@ -1055,7 +1062,7 @@
           <a:p>
             <a:pPr lvl="0"/>
             <a:r>
-              <a:rPr lang="en-US" smtClean="0"/>
+              <a:rPr lang="en-US"/>
               <a:t>Click to edit Master text styles</a:t>
             </a:r>
           </a:p>
@@ -1078,7 +1085,7 @@
           <a:p>
             <a:fld id="{5BCAD085-E8A6-8845-BD4E-CB4CCA059FC4}" type="datetimeFigureOut">
               <a:rPr lang="en-US" smtClean="0"/>
-              <a:t>1/27/13</a:t>
+              <a:t>5/15/2026</a:t>
             </a:fld>
             <a:endParaRPr lang="en-US"/>
           </a:p>
@@ -1120,7 +1127,7 @@
           <a:p>
             <a:fld id="{C1FF6DA9-008F-8B48-92A6-B652298478BF}" type="slidenum">
               <a:rPr lang="en-US" smtClean="0"/>
-              <a:t>‹#›</a:t>
+              <a:t>‹N°›</a:t>
             </a:fld>
             <a:endParaRPr lang="en-US"/>
           </a:p>
@@ -1172,10 +1179,9 @@
           <a:lstStyle/>
           <a:p>
             <a:r>
-              <a:rPr lang="en-US" smtClean="0"/>
+              <a:rPr lang="en-US"/>
               <a:t>Click to edit Master title style</a:t>
             </a:r>
-            <a:endParaRPr lang="en-US"/>
           </a:p>
         </p:txBody>
       </p:sp>
@@ -1229,38 +1235,37 @@
           <a:p>
             <a:pPr lvl="0"/>
             <a:r>
-              <a:rPr lang="en-US" smtClean="0"/>
+              <a:rPr lang="en-US"/>
               <a:t>Click to edit Master text styles</a:t>
             </a:r>
           </a:p>
           <a:p>
             <a:pPr lvl="1"/>
             <a:r>
-              <a:rPr lang="en-US" smtClean="0"/>
+              <a:rPr lang="en-US"/>
               <a:t>Second level</a:t>
             </a:r>
           </a:p>
           <a:p>
             <a:pPr lvl="2"/>
             <a:r>
-              <a:rPr lang="en-US" smtClean="0"/>
+              <a:rPr lang="en-US"/>
               <a:t>Third level</a:t>
             </a:r>
           </a:p>
           <a:p>
             <a:pPr lvl="3"/>
             <a:r>
-              <a:rPr lang="en-US" smtClean="0"/>
+              <a:rPr lang="en-US"/>
               <a:t>Fourth level</a:t>
             </a:r>
           </a:p>
           <a:p>
             <a:pPr lvl="4"/>
             <a:r>
-              <a:rPr lang="en-US" smtClean="0"/>
+              <a:rPr lang="en-US"/>
               <a:t>Fifth level</a:t>
             </a:r>
-            <a:endParaRPr lang="en-US"/>
           </a:p>
         </p:txBody>
       </p:sp>
@@ -1314,38 +1319,37 @@
           <a:p>
             <a:pPr lvl="0"/>
             <a:r>
-              <a:rPr lang="en-US" smtClean="0"/>
+              <a:rPr lang="en-US"/>
               <a:t>Click to edit Master text styles</a:t>
             </a:r>
           </a:p>
           <a:p>
             <a:pPr lvl="1"/>
             <a:r>
-              <a:rPr lang="en-US" smtClean="0"/>
+              <a:rPr lang="en-US"/>
               <a:t>Second level</a:t>
             </a:r>
           </a:p>
           <a:p>
             <a:pPr lvl="2"/>
             <a:r>
-              <a:rPr lang="en-US" smtClean="0"/>
+              <a:rPr lang="en-US"/>
               <a:t>Third level</a:t>
             </a:r>
           </a:p>
           <a:p>
             <a:pPr lvl="3"/>
             <a:r>
-              <a:rPr lang="en-US" smtClean="0"/>
+              <a:rPr lang="en-US"/>
               <a:t>Fourth level</a:t>
             </a:r>
           </a:p>
           <a:p>
             <a:pPr lvl="4"/>
             <a:r>
-              <a:rPr lang="en-US" smtClean="0"/>
+              <a:rPr lang="en-US"/>
               <a:t>Fifth level</a:t>
             </a:r>
-            <a:endParaRPr lang="en-US"/>
           </a:p>
         </p:txBody>
       </p:sp>
@@ -1366,7 +1370,7 @@
           <a:p>
             <a:fld id="{5BCAD085-E8A6-8845-BD4E-CB4CCA059FC4}" type="datetimeFigureOut">
               <a:rPr lang="en-US" smtClean="0"/>
-              <a:t>1/27/13</a:t>
+              <a:t>5/15/2026</a:t>
             </a:fld>
             <a:endParaRPr lang="en-US"/>
           </a:p>
@@ -1408,7 +1412,7 @@
           <a:p>
             <a:fld id="{C1FF6DA9-008F-8B48-92A6-B652298478BF}" type="slidenum">
               <a:rPr lang="en-US" smtClean="0"/>
-              <a:t>‹#›</a:t>
+              <a:t>‹N°›</a:t>
             </a:fld>
             <a:endParaRPr lang="en-US"/>
           </a:p>
@@ -1464,10 +1468,9 @@
           </a:lstStyle>
           <a:p>
             <a:r>
-              <a:rPr lang="en-US" smtClean="0"/>
+              <a:rPr lang="en-US"/>
               <a:t>Click to edit Master title style</a:t>
             </a:r>
-            <a:endParaRPr lang="en-US"/>
           </a:p>
         </p:txBody>
       </p:sp>
@@ -1530,7 +1533,7 @@
           <a:p>
             <a:pPr lvl="0"/>
             <a:r>
-              <a:rPr lang="en-US" smtClean="0"/>
+              <a:rPr lang="en-US"/>
               <a:t>Click to edit Master text styles</a:t>
             </a:r>
           </a:p>
@@ -1586,38 +1589,37 @@
           <a:p>
             <a:pPr lvl="0"/>
             <a:r>
-              <a:rPr lang="en-US" smtClean="0"/>
+              <a:rPr lang="en-US"/>
               <a:t>Click to edit Master text styles</a:t>
             </a:r>
           </a:p>
           <a:p>
             <a:pPr lvl="1"/>
             <a:r>
-              <a:rPr lang="en-US" smtClean="0"/>
+              <a:rPr lang="en-US"/>
               <a:t>Second level</a:t>
             </a:r>
           </a:p>
           <a:p>
             <a:pPr lvl="2"/>
             <a:r>
-              <a:rPr lang="en-US" smtClean="0"/>
+              <a:rPr lang="en-US"/>
               <a:t>Third level</a:t>
             </a:r>
           </a:p>
           <a:p>
             <a:pPr lvl="3"/>
             <a:r>
-              <a:rPr lang="en-US" smtClean="0"/>
+              <a:rPr lang="en-US"/>
               <a:t>Fourth level</a:t>
             </a:r>
           </a:p>
           <a:p>
             <a:pPr lvl="4"/>
             <a:r>
-              <a:rPr lang="en-US" smtClean="0"/>
+              <a:rPr lang="en-US"/>
               <a:t>Fifth level</a:t>
             </a:r>
-            <a:endParaRPr lang="en-US"/>
           </a:p>
         </p:txBody>
       </p:sp>
@@ -1680,7 +1682,7 @@
           <a:p>
             <a:pPr lvl="0"/>
             <a:r>
-              <a:rPr lang="en-US" smtClean="0"/>
+              <a:rPr lang="en-US"/>
               <a:t>Click to edit Master text styles</a:t>
             </a:r>
           </a:p>
@@ -1736,38 +1738,37 @@
           <a:p>
             <a:pPr lvl="0"/>
             <a:r>
-              <a:rPr lang="en-US" smtClean="0"/>
+              <a:rPr lang="en-US"/>
               <a:t>Click to edit Master text styles</a:t>
             </a:r>
           </a:p>
           <a:p>
             <a:pPr lvl="1"/>
             <a:r>
-              <a:rPr lang="en-US" smtClean="0"/>
+              <a:rPr lang="en-US"/>
               <a:t>Second level</a:t>
             </a:r>
           </a:p>
           <a:p>
             <a:pPr lvl="2"/>
             <a:r>
-              <a:rPr lang="en-US" smtClean="0"/>
+              <a:rPr lang="en-US"/>
               <a:t>Third level</a:t>
             </a:r>
           </a:p>
           <a:p>
             <a:pPr lvl="3"/>
             <a:r>
-              <a:rPr lang="en-US" smtClean="0"/>
+              <a:rPr lang="en-US"/>
               <a:t>Fourth level</a:t>
             </a:r>
           </a:p>
           <a:p>
             <a:pPr lvl="4"/>
             <a:r>
-              <a:rPr lang="en-US" smtClean="0"/>
+              <a:rPr lang="en-US"/>
               <a:t>Fifth level</a:t>
             </a:r>
-            <a:endParaRPr lang="en-US"/>
           </a:p>
         </p:txBody>
       </p:sp>
@@ -1788,7 +1789,7 @@
           <a:p>
             <a:fld id="{5BCAD085-E8A6-8845-BD4E-CB4CCA059FC4}" type="datetimeFigureOut">
               <a:rPr lang="en-US" smtClean="0"/>
-              <a:t>1/27/13</a:t>
+              <a:t>5/15/2026</a:t>
             </a:fld>
             <a:endParaRPr lang="en-US"/>
           </a:p>
@@ -1830,7 +1831,7 @@
           <a:p>
             <a:fld id="{C1FF6DA9-008F-8B48-92A6-B652298478BF}" type="slidenum">
               <a:rPr lang="en-US" smtClean="0"/>
-              <a:t>‹#›</a:t>
+              <a:t>‹N°›</a:t>
             </a:fld>
             <a:endParaRPr lang="en-US"/>
           </a:p>
@@ -1882,10 +1883,9 @@
           <a:lstStyle/>
           <a:p>
             <a:r>
-              <a:rPr lang="en-US" smtClean="0"/>
+              <a:rPr lang="en-US"/>
               <a:t>Click to edit Master title style</a:t>
             </a:r>
-            <a:endParaRPr lang="en-US"/>
           </a:p>
         </p:txBody>
       </p:sp>
@@ -1906,7 +1906,7 @@
           <a:p>
             <a:fld id="{5BCAD085-E8A6-8845-BD4E-CB4CCA059FC4}" type="datetimeFigureOut">
               <a:rPr lang="en-US" smtClean="0"/>
-              <a:t>1/27/13</a:t>
+              <a:t>5/15/2026</a:t>
             </a:fld>
             <a:endParaRPr lang="en-US"/>
           </a:p>
@@ -1948,7 +1948,7 @@
           <a:p>
             <a:fld id="{C1FF6DA9-008F-8B48-92A6-B652298478BF}" type="slidenum">
               <a:rPr lang="en-US" smtClean="0"/>
-              <a:t>‹#›</a:t>
+              <a:t>‹N°›</a:t>
             </a:fld>
             <a:endParaRPr lang="en-US"/>
           </a:p>
@@ -2001,7 +2001,7 @@
           <a:p>
             <a:fld id="{5BCAD085-E8A6-8845-BD4E-CB4CCA059FC4}" type="datetimeFigureOut">
               <a:rPr lang="en-US" smtClean="0"/>
-              <a:t>1/27/13</a:t>
+              <a:t>5/15/2026</a:t>
             </a:fld>
             <a:endParaRPr lang="en-US"/>
           </a:p>
@@ -2043,7 +2043,7 @@
           <a:p>
             <a:fld id="{C1FF6DA9-008F-8B48-92A6-B652298478BF}" type="slidenum">
               <a:rPr lang="en-US" smtClean="0"/>
-              <a:t>‹#›</a:t>
+              <a:t>‹N°›</a:t>
             </a:fld>
             <a:endParaRPr lang="en-US"/>
           </a:p>
@@ -2104,10 +2104,9 @@
           </a:lstStyle>
           <a:p>
             <a:r>
-              <a:rPr lang="en-US" smtClean="0"/>
+              <a:rPr lang="en-US"/>
               <a:t>Click to edit Master title style</a:t>
             </a:r>
-            <a:endParaRPr lang="en-US"/>
           </a:p>
         </p:txBody>
       </p:sp>
@@ -2161,38 +2160,37 @@
           <a:p>
             <a:pPr lvl="0"/>
             <a:r>
-              <a:rPr lang="en-US" smtClean="0"/>
+              <a:rPr lang="en-US"/>
               <a:t>Click to edit Master text styles</a:t>
             </a:r>
           </a:p>
           <a:p>
             <a:pPr lvl="1"/>
             <a:r>
-              <a:rPr lang="en-US" smtClean="0"/>
+              <a:rPr lang="en-US"/>
               <a:t>Second level</a:t>
             </a:r>
           </a:p>
           <a:p>
             <a:pPr lvl="2"/>
             <a:r>
-              <a:rPr lang="en-US" smtClean="0"/>
+              <a:rPr lang="en-US"/>
               <a:t>Third level</a:t>
             </a:r>
           </a:p>
           <a:p>
             <a:pPr lvl="3"/>
             <a:r>
-              <a:rPr lang="en-US" smtClean="0"/>
+              <a:rPr lang="en-US"/>
               <a:t>Fourth level</a:t>
             </a:r>
           </a:p>
           <a:p>
             <a:pPr lvl="4"/>
             <a:r>
-              <a:rPr lang="en-US" smtClean="0"/>
+              <a:rPr lang="en-US"/>
               <a:t>Fifth level</a:t>
             </a:r>
-            <a:endParaRPr lang="en-US"/>
           </a:p>
         </p:txBody>
       </p:sp>
@@ -2255,7 +2253,7 @@
           <a:p>
             <a:pPr lvl="0"/>
             <a:r>
-              <a:rPr lang="en-US" smtClean="0"/>
+              <a:rPr lang="en-US"/>
               <a:t>Click to edit Master text styles</a:t>
             </a:r>
           </a:p>
@@ -2278,7 +2276,7 @@
           <a:p>
             <a:fld id="{5BCAD085-E8A6-8845-BD4E-CB4CCA059FC4}" type="datetimeFigureOut">
               <a:rPr lang="en-US" smtClean="0"/>
-              <a:t>1/27/13</a:t>
+              <a:t>5/15/2026</a:t>
             </a:fld>
             <a:endParaRPr lang="en-US"/>
           </a:p>
@@ -2320,7 +2318,7 @@
           <a:p>
             <a:fld id="{C1FF6DA9-008F-8B48-92A6-B652298478BF}" type="slidenum">
               <a:rPr lang="en-US" smtClean="0"/>
-              <a:t>‹#›</a:t>
+              <a:t>‹N°›</a:t>
             </a:fld>
             <a:endParaRPr lang="en-US"/>
           </a:p>
@@ -2381,10 +2379,9 @@
           </a:lstStyle>
           <a:p>
             <a:r>
-              <a:rPr lang="en-US" smtClean="0"/>
+              <a:rPr lang="en-US"/>
               <a:t>Click to edit Master title style</a:t>
             </a:r>
-            <a:endParaRPr lang="en-US"/>
           </a:p>
         </p:txBody>
       </p:sp>
@@ -2508,7 +2505,7 @@
           <a:p>
             <a:pPr lvl="0"/>
             <a:r>
-              <a:rPr lang="en-US" smtClean="0"/>
+              <a:rPr lang="en-US"/>
               <a:t>Click to edit Master text styles</a:t>
             </a:r>
           </a:p>
@@ -2531,7 +2528,7 @@
           <a:p>
             <a:fld id="{5BCAD085-E8A6-8845-BD4E-CB4CCA059FC4}" type="datetimeFigureOut">
               <a:rPr lang="en-US" smtClean="0"/>
-              <a:t>1/27/13</a:t>
+              <a:t>5/15/2026</a:t>
             </a:fld>
             <a:endParaRPr lang="en-US"/>
           </a:p>
@@ -2573,7 +2570,7 @@
           <a:p>
             <a:fld id="{C1FF6DA9-008F-8B48-92A6-B652298478BF}" type="slidenum">
               <a:rPr lang="en-US" smtClean="0"/>
-              <a:t>‹#›</a:t>
+              <a:t>‹N°›</a:t>
             </a:fld>
             <a:endParaRPr lang="en-US"/>
           </a:p>
@@ -2640,10 +2637,9 @@
           <a:lstStyle/>
           <a:p>
             <a:r>
-              <a:rPr lang="en-US" smtClean="0"/>
+              <a:rPr lang="en-US"/>
               <a:t>Click to edit Master title style</a:t>
             </a:r>
-            <a:endParaRPr lang="en-US"/>
           </a:p>
         </p:txBody>
       </p:sp>
@@ -2674,38 +2670,37 @@
           <a:p>
             <a:pPr lvl="0"/>
             <a:r>
-              <a:rPr lang="en-US" smtClean="0"/>
+              <a:rPr lang="en-US"/>
               <a:t>Click to edit Master text styles</a:t>
             </a:r>
           </a:p>
           <a:p>
             <a:pPr lvl="1"/>
             <a:r>
-              <a:rPr lang="en-US" smtClean="0"/>
+              <a:rPr lang="en-US"/>
               <a:t>Second level</a:t>
             </a:r>
           </a:p>
           <a:p>
             <a:pPr lvl="2"/>
             <a:r>
-              <a:rPr lang="en-US" smtClean="0"/>
+              <a:rPr lang="en-US"/>
               <a:t>Third level</a:t>
             </a:r>
           </a:p>
           <a:p>
             <a:pPr lvl="3"/>
             <a:r>
-              <a:rPr lang="en-US" smtClean="0"/>
+              <a:rPr lang="en-US"/>
               <a:t>Fourth level</a:t>
             </a:r>
           </a:p>
           <a:p>
             <a:pPr lvl="4"/>
             <a:r>
-              <a:rPr lang="en-US" smtClean="0"/>
+              <a:rPr lang="en-US"/>
               <a:t>Fifth level</a:t>
             </a:r>
-            <a:endParaRPr lang="en-US"/>
           </a:p>
         </p:txBody>
       </p:sp>
@@ -2744,7 +2739,7 @@
           <a:p>
             <a:fld id="{5BCAD085-E8A6-8845-BD4E-CB4CCA059FC4}" type="datetimeFigureOut">
               <a:rPr lang="en-US" smtClean="0"/>
-              <a:t>1/27/13</a:t>
+              <a:t>5/15/2026</a:t>
             </a:fld>
             <a:endParaRPr lang="en-US"/>
           </a:p>
@@ -2822,7 +2817,7 @@
           <a:p>
             <a:fld id="{C1FF6DA9-008F-8B48-92A6-B652298478BF}" type="slidenum">
               <a:rPr lang="en-US" smtClean="0"/>
-              <a:t>‹#›</a:t>
+              <a:t>‹N°›</a:t>
             </a:fld>
             <a:endParaRPr lang="en-US"/>
           </a:p>
@@ -3103,7 +3098,7 @@
 </file>
 
 <file path=ppt/slides/slide1.xml><?xml version="1.0" encoding="utf-8"?>
-<p:sld xmlns:a="http://schemas.openxmlformats.org/drawingml/2006/main" xmlns:p="http://schemas.openxmlformats.org/presentationml/2006/main" xmlns:r="http://schemas.openxmlformats.org/officeDocument/2006/relationships">
+<p:sld xmlns:a="http://schemas.openxmlformats.org/drawingml/2006/main" xmlns:r="http://schemas.openxmlformats.org/officeDocument/2006/relationships" xmlns:p="http://schemas.openxmlformats.org/presentationml/2006/main">
   <p:cSld>
     <p:spTree>
       <p:nvGrpSpPr>
@@ -3111,7 +3106,14 @@
         <p:cNvGrpSpPr/>
         <p:nvPr/>
       </p:nvGrpSpPr>
-      <p:grpSpPr/>
+      <p:grpSpPr>
+        <a:xfrm>
+          <a:off x="0" y="0"/>
+          <a:ext cx="0" cy="0"/>
+          <a:chOff x="0" y="0"/>
+          <a:chExt cx="0" cy="0"/>
+        </a:xfrm>
+      </p:grpSpPr>
       <p:sp>
         <p:nvSpPr>
           <p:cNvPr id="2" name="Rectangle 1"/>
@@ -3120,7 +3122,7 @@
         </p:nvSpPr>
         <p:spPr>
           <a:xfrm>
-            <a:off x="0" y="0"/>
+            <a:off x="305" y="0"/>
             <a:ext cx="12191695" cy="6858000"/>
           </a:xfrm>
           <a:prstGeom prst="rect">
@@ -3152,6 +3154,7 @@
           <a:lstStyle/>
           <a:p>
             <a:pPr algn="ctr"/>
+            <a:endParaRPr/>
           </a:p>
         </p:txBody>
       </p:sp>
@@ -3195,6 +3198,7 @@
           <a:lstStyle/>
           <a:p>
             <a:pPr algn="ctr"/>
+            <a:endParaRPr/>
           </a:p>
         </p:txBody>
       </p:sp>
@@ -3238,6 +3242,7 @@
           <a:lstStyle/>
           <a:p>
             <a:pPr algn="ctr"/>
+            <a:endParaRPr/>
           </a:p>
         </p:txBody>
       </p:sp>
@@ -3283,7 +3288,7 @@
         </p:nvSpPr>
         <p:spPr>
           <a:xfrm>
-            <a:off x="1463040" y="2514600"/>
+            <a:off x="1569567" y="2010977"/>
             <a:ext cx="10058400" cy="640080"/>
           </a:xfrm>
           <a:prstGeom prst="rect">
@@ -3299,12 +3304,28 @@
           <a:p>
             <a:pPr algn="ctr"/>
             <a:r>
-              <a:rPr sz="1800" b="0" i="0">
+              <a:rPr sz="1800" b="0" i="0" dirty="0">
                 <a:solidFill>
                   <a:srgbClr val="BBDEFB"/>
                 </a:solidFill>
               </a:rPr>
-              <a:t>Architecture Big Data pour l'Analyse des Articles de Presse</a:t>
+              <a:t>Architecture Big Data pour </a:t>
+            </a:r>
+            <a:r>
+              <a:rPr sz="1800" b="0" i="0" dirty="0" err="1">
+                <a:solidFill>
+                  <a:srgbClr val="BBDEFB"/>
+                </a:solidFill>
+              </a:rPr>
+              <a:t>l'Analyse</a:t>
+            </a:r>
+            <a:r>
+              <a:rPr sz="1800" b="0" i="0" dirty="0">
+                <a:solidFill>
+                  <a:srgbClr val="BBDEFB"/>
+                </a:solidFill>
+              </a:rPr>
+              <a:t> des Articles de Presse</a:t>
             </a:r>
           </a:p>
         </p:txBody>
@@ -3317,7 +3338,7 @@
         </p:nvSpPr>
         <p:spPr>
           <a:xfrm>
-            <a:off x="1463040" y="3200400"/>
+            <a:off x="1463040" y="2828544"/>
             <a:ext cx="10058400" cy="457200"/>
           </a:xfrm>
           <a:prstGeom prst="rect">
@@ -3383,6 +3404,7 @@
           <a:lstStyle/>
           <a:p>
             <a:pPr algn="ctr"/>
+            <a:endParaRPr/>
           </a:p>
         </p:txBody>
       </p:sp>
@@ -3494,6 +3516,7 @@
           <a:lstStyle/>
           <a:p>
             <a:pPr algn="ctr"/>
+            <a:endParaRPr/>
           </a:p>
         </p:txBody>
       </p:sp>
@@ -3605,6 +3628,7 @@
           <a:lstStyle/>
           <a:p>
             <a:pPr algn="ctr"/>
+            <a:endParaRPr/>
           </a:p>
         </p:txBody>
       </p:sp>
@@ -3716,6 +3740,7 @@
           <a:lstStyle/>
           <a:p>
             <a:pPr algn="ctr"/>
+            <a:endParaRPr/>
           </a:p>
         </p:txBody>
       </p:sp>
@@ -3827,6 +3852,7 @@
           <a:lstStyle/>
           <a:p>
             <a:pPr algn="ctr"/>
+            <a:endParaRPr/>
           </a:p>
         </p:txBody>
       </p:sp>
@@ -3938,6 +3964,7 @@
           <a:lstStyle/>
           <a:p>
             <a:pPr algn="ctr"/>
+            <a:endParaRPr/>
           </a:p>
         </p:txBody>
       </p:sp>
@@ -4051,6 +4078,7 @@
           <a:lstStyle/>
           <a:p>
             <a:pPr algn="ctr"/>
+            <a:endParaRPr/>
           </a:p>
         </p:txBody>
       </p:sp>
@@ -4164,6 +4192,7 @@
           <a:lstStyle/>
           <a:p>
             <a:pPr algn="ctr"/>
+            <a:endParaRPr/>
           </a:p>
         </p:txBody>
       </p:sp>
@@ -4210,28 +4239,57 @@
         <p:spPr>
           <a:xfrm>
             <a:off x="4358487" y="5376672"/>
-            <a:ext cx="3474720" cy="566928"/>
-          </a:xfrm>
-          <a:prstGeom prst="rect">
-            <a:avLst/>
-          </a:prstGeom>
-          <a:noFill/>
-        </p:spPr>
-        <p:txBody>
-          <a:bodyPr wrap="square">
-            <a:spAutoFit/>
-          </a:bodyPr>
-          <a:lstStyle/>
-          <a:p>
-            <a:pPr algn="ctr"/>
-            <a:r>
-              <a:rPr sz="1100" b="0" i="0">
+            <a:ext cx="3474720" cy="261610"/>
+          </a:xfrm>
+          <a:prstGeom prst="rect">
+            <a:avLst/>
+          </a:prstGeom>
+          <a:noFill/>
+        </p:spPr>
+        <p:txBody>
+          <a:bodyPr wrap="square">
+            <a:spAutoFit/>
+          </a:bodyPr>
+          <a:lstStyle/>
+          <a:p>
+            <a:pPr algn="ctr"/>
+            <a:r>
+              <a:rPr lang="en-US" sz="1100" b="0" i="0" dirty="0">
                 <a:solidFill>
                   <a:srgbClr val="FFFFFF"/>
                 </a:solidFill>
               </a:rPr>
+              <a:t>4 IAD </a:t>
+            </a:r>
+            <a:r>
+              <a:rPr sz="1100" b="0" i="0" dirty="0">
+                <a:solidFill>
+                  <a:srgbClr val="FFFFFF"/>
+                </a:solidFill>
+              </a:rPr>
               <a:t>G1</a:t>
             </a:r>
+            <a:r>
+              <a:rPr lang="en-US" sz="1100" b="0" i="0" dirty="0">
+                <a:solidFill>
+                  <a:srgbClr val="FFFFFF"/>
+                </a:solidFill>
+              </a:rPr>
+              <a:t> Moulay </a:t>
+            </a:r>
+            <a:r>
+              <a:rPr lang="en-US" sz="1100" b="0" i="0" dirty="0" err="1">
+                <a:solidFill>
+                  <a:srgbClr val="FFFFFF"/>
+                </a:solidFill>
+              </a:rPr>
+              <a:t>youssef</a:t>
+            </a:r>
+            <a:endParaRPr sz="1100" b="0" i="0" dirty="0">
+              <a:solidFill>
+                <a:srgbClr val="FFFFFF"/>
+              </a:solidFill>
+            </a:endParaRPr>
           </a:p>
         </p:txBody>
       </p:sp>
@@ -4277,6 +4335,7 @@
           <a:lstStyle/>
           <a:p>
             <a:pPr algn="ctr"/>
+            <a:endParaRPr/>
           </a:p>
         </p:txBody>
       </p:sp>
@@ -4357,7 +4416,7 @@
 </file>
 
 <file path=ppt/slides/slide10.xml><?xml version="1.0" encoding="utf-8"?>
-<p:sld xmlns:a="http://schemas.openxmlformats.org/drawingml/2006/main" xmlns:p="http://schemas.openxmlformats.org/presentationml/2006/main" xmlns:r="http://schemas.openxmlformats.org/officeDocument/2006/relationships">
+<p:sld xmlns:a="http://schemas.openxmlformats.org/drawingml/2006/main" xmlns:r="http://schemas.openxmlformats.org/officeDocument/2006/relationships" xmlns:p="http://schemas.openxmlformats.org/presentationml/2006/main">
   <p:cSld>
     <p:spTree>
       <p:nvGrpSpPr>
@@ -4365,7 +4424,14 @@
         <p:cNvGrpSpPr/>
         <p:nvPr/>
       </p:nvGrpSpPr>
-      <p:grpSpPr/>
+      <p:grpSpPr>
+        <a:xfrm>
+          <a:off x="0" y="0"/>
+          <a:ext cx="0" cy="0"/>
+          <a:chOff x="0" y="0"/>
+          <a:chExt cx="0" cy="0"/>
+        </a:xfrm>
+      </p:grpSpPr>
       <p:sp>
         <p:nvSpPr>
           <p:cNvPr id="2" name="Rectangle 1"/>
@@ -4374,7 +4440,7 @@
         </p:nvSpPr>
         <p:spPr>
           <a:xfrm>
-            <a:off x="0" y="0"/>
+            <a:off x="0" y="11724"/>
             <a:ext cx="12191695" cy="6858000"/>
           </a:xfrm>
           <a:prstGeom prst="rect">
@@ -4406,6 +4472,7 @@
           <a:lstStyle/>
           <a:p>
             <a:pPr algn="ctr"/>
+            <a:endParaRPr/>
           </a:p>
         </p:txBody>
       </p:sp>
@@ -4449,6 +4516,7 @@
           <a:lstStyle/>
           <a:p>
             <a:pPr algn="ctr"/>
+            <a:endParaRPr/>
           </a:p>
         </p:txBody>
       </p:sp>
@@ -4492,6 +4560,7 @@
           <a:lstStyle/>
           <a:p>
             <a:pPr algn="ctr"/>
+            <a:endParaRPr/>
           </a:p>
         </p:txBody>
       </p:sp>
@@ -4572,7 +4641,7 @@
         <p:spPr>
           <a:xfrm>
             <a:off x="411480" y="1828800"/>
-            <a:ext cx="1719072" cy="3200400"/>
+            <a:ext cx="1719072" cy="2084832"/>
           </a:xfrm>
           <a:prstGeom prst="roundRect">
             <a:avLst/>
@@ -4605,6 +4674,7 @@
           <a:lstStyle/>
           <a:p>
             <a:pPr algn="ctr"/>
+            <a:endParaRPr dirty="0"/>
           </a:p>
         </p:txBody>
       </p:sp>
@@ -4648,6 +4718,7 @@
           <a:lstStyle/>
           <a:p>
             <a:pPr algn="ctr"/>
+            <a:endParaRPr/>
           </a:p>
         </p:txBody>
       </p:sp>
@@ -4693,7 +4764,7 @@
         </p:nvSpPr>
         <p:spPr>
           <a:xfrm>
-            <a:off x="411480" y="1993392"/>
+            <a:off x="420624" y="2189285"/>
             <a:ext cx="1719072" cy="658368"/>
           </a:xfrm>
           <a:prstGeom prst="rect">
@@ -4709,7 +4780,7 @@
           <a:p>
             <a:pPr algn="ctr"/>
             <a:r>
-              <a:rPr sz="1300" b="1" i="0">
+              <a:rPr sz="1300" b="1" i="0" dirty="0">
                 <a:solidFill>
                   <a:srgbClr val="1565C0"/>
                 </a:solidFill>
@@ -4798,7 +4869,7 @@
         <p:spPr>
           <a:xfrm>
             <a:off x="2386584" y="1828800"/>
-            <a:ext cx="1719072" cy="3200400"/>
+            <a:ext cx="1719072" cy="2116836"/>
           </a:xfrm>
           <a:prstGeom prst="roundRect">
             <a:avLst/>
@@ -4831,6 +4902,7 @@
           <a:lstStyle/>
           <a:p>
             <a:pPr algn="ctr"/>
+            <a:endParaRPr/>
           </a:p>
         </p:txBody>
       </p:sp>
@@ -4874,6 +4946,7 @@
           <a:lstStyle/>
           <a:p>
             <a:pPr algn="ctr"/>
+            <a:endParaRPr/>
           </a:p>
         </p:txBody>
       </p:sp>
@@ -4920,27 +4993,43 @@
         <p:spPr>
           <a:xfrm>
             <a:off x="2386584" y="1993392"/>
-            <a:ext cx="1719072" cy="658368"/>
-          </a:xfrm>
-          <a:prstGeom prst="rect">
-            <a:avLst/>
-          </a:prstGeom>
-          <a:noFill/>
-        </p:spPr>
-        <p:txBody>
-          <a:bodyPr wrap="square">
-            <a:spAutoFit/>
-          </a:bodyPr>
-          <a:lstStyle/>
-          <a:p>
-            <a:pPr algn="ctr"/>
-            <a:r>
-              <a:rPr sz="1300" b="1" i="0">
+            <a:ext cx="1719072" cy="692497"/>
+          </a:xfrm>
+          <a:prstGeom prst="rect">
+            <a:avLst/>
+          </a:prstGeom>
+          <a:noFill/>
+        </p:spPr>
+        <p:txBody>
+          <a:bodyPr wrap="square">
+            <a:spAutoFit/>
+          </a:bodyPr>
+          <a:lstStyle/>
+          <a:p>
+            <a:pPr algn="ctr"/>
+            <a:endParaRPr lang="en-US" sz="1300" b="1" i="0" dirty="0">
+              <a:solidFill>
+                <a:srgbClr val="E65100"/>
+              </a:solidFill>
+            </a:endParaRPr>
+          </a:p>
+          <a:p>
+            <a:pPr algn="ctr"/>
+            <a:r>
+              <a:rPr sz="1300" b="1" i="0" dirty="0" err="1">
                 <a:solidFill>
                   <a:srgbClr val="E65100"/>
                 </a:solidFill>
               </a:rPr>
-              <a:t>Nettoyage
+              <a:t>Nettoyage</a:t>
+            </a:r>
+            <a:r>
+              <a:rPr sz="1300" b="1" i="0" dirty="0">
+                <a:solidFill>
+                  <a:srgbClr val="E65100"/>
+                </a:solidFill>
+              </a:rPr>
+              <a:t>
 HTML</a:t>
             </a:r>
           </a:p>
@@ -5023,8 +5112,8 @@
         </p:nvSpPr>
         <p:spPr>
           <a:xfrm>
-            <a:off x="4361688" y="1828800"/>
-            <a:ext cx="1719072" cy="3200400"/>
+            <a:off x="4382790" y="1865377"/>
+            <a:ext cx="1719072" cy="2116836"/>
           </a:xfrm>
           <a:prstGeom prst="roundRect">
             <a:avLst/>
@@ -5057,6 +5146,7 @@
           <a:lstStyle/>
           <a:p>
             <a:pPr algn="ctr"/>
+            <a:endParaRPr/>
           </a:p>
         </p:txBody>
       </p:sp>
@@ -5100,6 +5190,7 @@
           <a:lstStyle/>
           <a:p>
             <a:pPr algn="ctr"/>
+            <a:endParaRPr/>
           </a:p>
         </p:txBody>
       </p:sp>
@@ -5145,7 +5236,7 @@
         </p:nvSpPr>
         <p:spPr>
           <a:xfrm>
-            <a:off x="4361688" y="1993392"/>
+            <a:off x="4361688" y="2231136"/>
             <a:ext cx="1719072" cy="658368"/>
           </a:xfrm>
           <a:prstGeom prst="rect">
@@ -5248,8 +5339,8 @@
         </p:nvSpPr>
         <p:spPr>
           <a:xfrm>
-            <a:off x="6336792" y="1828800"/>
-            <a:ext cx="1719072" cy="3200400"/>
+            <a:off x="6291072" y="1817371"/>
+            <a:ext cx="1719072" cy="2183130"/>
           </a:xfrm>
           <a:prstGeom prst="roundRect">
             <a:avLst/>
@@ -5282,6 +5373,7 @@
           <a:lstStyle/>
           <a:p>
             <a:pPr algn="ctr"/>
+            <a:endParaRPr/>
           </a:p>
         </p:txBody>
       </p:sp>
@@ -5325,6 +5417,7 @@
           <a:lstStyle/>
           <a:p>
             <a:pPr algn="ctr"/>
+            <a:endParaRPr/>
           </a:p>
         </p:txBody>
       </p:sp>
@@ -5370,7 +5463,7 @@
         </p:nvSpPr>
         <p:spPr>
           <a:xfrm>
-            <a:off x="6336792" y="1993392"/>
+            <a:off x="6336792" y="2199132"/>
             <a:ext cx="1719072" cy="658368"/>
           </a:xfrm>
           <a:prstGeom prst="rect">
@@ -5386,12 +5479,20 @@
           <a:p>
             <a:pPr algn="ctr"/>
             <a:r>
-              <a:rPr sz="1300" b="1" i="0">
+              <a:rPr sz="1300" b="1" i="0" dirty="0" err="1">
                 <a:solidFill>
                   <a:srgbClr val="2E7D32"/>
                 </a:solidFill>
               </a:rPr>
-              <a:t>Détection
+              <a:t>Détection</a:t>
+            </a:r>
+            <a:r>
+              <a:rPr sz="1300" b="1" i="0" dirty="0">
+                <a:solidFill>
+                  <a:srgbClr val="2E7D32"/>
+                </a:solidFill>
+              </a:rPr>
+              <a:t>
 Langue</a:t>
             </a:r>
           </a:p>
@@ -5475,7 +5576,7 @@
         <p:spPr>
           <a:xfrm>
             <a:off x="8311896" y="1828800"/>
-            <a:ext cx="1719072" cy="3200400"/>
+            <a:ext cx="1719072" cy="2171701"/>
           </a:xfrm>
           <a:prstGeom prst="roundRect">
             <a:avLst/>
@@ -5508,6 +5609,7 @@
           <a:lstStyle/>
           <a:p>
             <a:pPr algn="ctr"/>
+            <a:endParaRPr/>
           </a:p>
         </p:txBody>
       </p:sp>
@@ -5551,6 +5653,7 @@
           <a:lstStyle/>
           <a:p>
             <a:pPr algn="ctr"/>
+            <a:endParaRPr/>
           </a:p>
         </p:txBody>
       </p:sp>
@@ -5596,7 +5699,7 @@
         </p:nvSpPr>
         <p:spPr>
           <a:xfrm>
-            <a:off x="8311896" y="1993392"/>
+            <a:off x="8311896" y="2194560"/>
             <a:ext cx="1719072" cy="658368"/>
           </a:xfrm>
           <a:prstGeom prst="rect">
@@ -5612,13 +5715,18 @@
           <a:p>
             <a:pPr algn="ctr"/>
             <a:r>
-              <a:rPr sz="1300" b="1" i="0">
+              <a:rPr sz="1300" b="1" i="0" dirty="0" err="1">
                 <a:solidFill>
                   <a:srgbClr val="00796B"/>
                 </a:solidFill>
               </a:rPr>
               <a:t>Déduplication</a:t>
             </a:r>
+            <a:endParaRPr sz="1300" b="1" i="0" dirty="0">
+              <a:solidFill>
+                <a:srgbClr val="00796B"/>
+              </a:solidFill>
+            </a:endParaRPr>
           </a:p>
         </p:txBody>
       </p:sp>
@@ -5700,7 +5808,7 @@
         <p:spPr>
           <a:xfrm>
             <a:off x="10287000" y="1828800"/>
-            <a:ext cx="1719072" cy="3200400"/>
+            <a:ext cx="1719072" cy="2171701"/>
           </a:xfrm>
           <a:prstGeom prst="roundRect">
             <a:avLst/>
@@ -5733,6 +5841,7 @@
           <a:lstStyle/>
           <a:p>
             <a:pPr algn="ctr"/>
+            <a:endParaRPr/>
           </a:p>
         </p:txBody>
       </p:sp>
@@ -5776,6 +5885,7 @@
           <a:lstStyle/>
           <a:p>
             <a:pPr algn="ctr"/>
+            <a:endParaRPr/>
           </a:p>
         </p:txBody>
       </p:sp>
@@ -5821,7 +5931,7 @@
         </p:nvSpPr>
         <p:spPr>
           <a:xfrm>
-            <a:off x="10287000" y="1993392"/>
+            <a:off x="10291689" y="2267243"/>
             <a:ext cx="1719072" cy="658368"/>
           </a:xfrm>
           <a:prstGeom prst="rect">
@@ -5837,12 +5947,20 @@
           <a:p>
             <a:pPr algn="ctr"/>
             <a:r>
-              <a:rPr sz="1300" b="1" i="0">
+              <a:rPr sz="1300" b="1" i="0" dirty="0" err="1">
                 <a:solidFill>
                   <a:srgbClr val="C62828"/>
                 </a:solidFill>
               </a:rPr>
-              <a:t>Écriture
+              <a:t>Écriture</a:t>
+            </a:r>
+            <a:r>
+              <a:rPr sz="1300" b="1" i="0" dirty="0">
+                <a:solidFill>
+                  <a:srgbClr val="C62828"/>
+                </a:solidFill>
+              </a:rPr>
+              <a:t>
 Silver</a:t>
             </a:r>
           </a:p>
@@ -5872,13 +5990,29 @@
           <a:p>
             <a:pPr algn="ctr"/>
             <a:r>
-              <a:rPr sz="1050" b="0" i="0">
+              <a:rPr sz="1050" b="0" i="0" dirty="0">
                 <a:solidFill>
                   <a:srgbClr val="424242"/>
                 </a:solidFill>
               </a:rPr>
               <a:t>Parquet Snappy
-vers MinIO silver/</a:t>
+vers </a:t>
+            </a:r>
+            <a:r>
+              <a:rPr sz="1050" b="0" i="0" dirty="0" err="1">
+                <a:solidFill>
+                  <a:srgbClr val="424242"/>
+                </a:solidFill>
+              </a:rPr>
+              <a:t>MinIO</a:t>
+            </a:r>
+            <a:r>
+              <a:rPr sz="1050" b="0" i="0" dirty="0">
+                <a:solidFill>
+                  <a:srgbClr val="424242"/>
+                </a:solidFill>
+              </a:rPr>
+              <a:t> silver/</a:t>
             </a:r>
           </a:p>
         </p:txBody>
@@ -5925,6 +6059,7 @@
           <a:lstStyle/>
           <a:p>
             <a:pPr algn="ctr"/>
+            <a:endParaRPr/>
           </a:p>
         </p:txBody>
       </p:sp>
@@ -5971,7 +6106,7 @@
 </file>
 
 <file path=ppt/slides/slide11.xml><?xml version="1.0" encoding="utf-8"?>
-<p:sld xmlns:a="http://schemas.openxmlformats.org/drawingml/2006/main" xmlns:p="http://schemas.openxmlformats.org/presentationml/2006/main" xmlns:r="http://schemas.openxmlformats.org/officeDocument/2006/relationships">
+<p:sld xmlns:a="http://schemas.openxmlformats.org/drawingml/2006/main" xmlns:r="http://schemas.openxmlformats.org/officeDocument/2006/relationships" xmlns:p="http://schemas.openxmlformats.org/presentationml/2006/main">
   <p:cSld>
     <p:spTree>
       <p:nvGrpSpPr>
@@ -5979,7 +6114,14 @@
         <p:cNvGrpSpPr/>
         <p:nvPr/>
       </p:nvGrpSpPr>
-      <p:grpSpPr/>
+      <p:grpSpPr>
+        <a:xfrm>
+          <a:off x="0" y="0"/>
+          <a:ext cx="0" cy="0"/>
+          <a:chOff x="0" y="0"/>
+          <a:chExt cx="0" cy="0"/>
+        </a:xfrm>
+      </p:grpSpPr>
       <p:sp>
         <p:nvSpPr>
           <p:cNvPr id="2" name="Rectangle 1"/>
@@ -6020,6 +6162,7 @@
           <a:lstStyle/>
           <a:p>
             <a:pPr algn="ctr"/>
+            <a:endParaRPr/>
           </a:p>
         </p:txBody>
       </p:sp>
@@ -6063,6 +6206,7 @@
           <a:lstStyle/>
           <a:p>
             <a:pPr algn="ctr"/>
+            <a:endParaRPr/>
           </a:p>
         </p:txBody>
       </p:sp>
@@ -6106,6 +6250,7 @@
           <a:lstStyle/>
           <a:p>
             <a:pPr algn="ctr"/>
+            <a:endParaRPr/>
           </a:p>
         </p:txBody>
       </p:sp>
@@ -6219,6 +6364,7 @@
           <a:lstStyle/>
           <a:p>
             <a:pPr algn="ctr"/>
+            <a:endParaRPr/>
           </a:p>
         </p:txBody>
       </p:sp>
@@ -6262,6 +6408,7 @@
           <a:lstStyle/>
           <a:p>
             <a:pPr algn="ctr"/>
+            <a:endParaRPr/>
           </a:p>
         </p:txBody>
       </p:sp>
@@ -6373,6 +6520,7 @@
           <a:lstStyle/>
           <a:p>
             <a:pPr algn="ctr"/>
+            <a:endParaRPr/>
           </a:p>
         </p:txBody>
       </p:sp>
@@ -6588,6 +6736,7 @@
           <a:lstStyle/>
           <a:p>
             <a:pPr algn="ctr"/>
+            <a:endParaRPr/>
           </a:p>
         </p:txBody>
       </p:sp>
@@ -6631,6 +6780,7 @@
           <a:lstStyle/>
           <a:p>
             <a:pPr algn="ctr"/>
+            <a:endParaRPr/>
           </a:p>
         </p:txBody>
       </p:sp>
@@ -6742,6 +6892,7 @@
           <a:lstStyle/>
           <a:p>
             <a:pPr algn="ctr"/>
+            <a:endParaRPr/>
           </a:p>
         </p:txBody>
       </p:sp>
@@ -6957,6 +7108,7 @@
           <a:lstStyle/>
           <a:p>
             <a:pPr algn="ctr"/>
+            <a:endParaRPr/>
           </a:p>
         </p:txBody>
       </p:sp>
@@ -7000,6 +7152,7 @@
           <a:lstStyle/>
           <a:p>
             <a:pPr algn="ctr"/>
+            <a:endParaRPr/>
           </a:p>
         </p:txBody>
       </p:sp>
@@ -7111,6 +7264,7 @@
           <a:lstStyle/>
           <a:p>
             <a:pPr algn="ctr"/>
+            <a:endParaRPr/>
           </a:p>
         </p:txBody>
       </p:sp>
@@ -7326,6 +7480,7 @@
           <a:lstStyle/>
           <a:p>
             <a:pPr algn="ctr"/>
+            <a:endParaRPr/>
           </a:p>
         </p:txBody>
       </p:sp>
@@ -7372,7 +7527,7 @@
 </file>
 
 <file path=ppt/slides/slide12.xml><?xml version="1.0" encoding="utf-8"?>
-<p:sld xmlns:a="http://schemas.openxmlformats.org/drawingml/2006/main" xmlns:p="http://schemas.openxmlformats.org/presentationml/2006/main" xmlns:r="http://schemas.openxmlformats.org/officeDocument/2006/relationships">
+<p:sld xmlns:a="http://schemas.openxmlformats.org/drawingml/2006/main" xmlns:r="http://schemas.openxmlformats.org/officeDocument/2006/relationships" xmlns:p="http://schemas.openxmlformats.org/presentationml/2006/main">
   <p:cSld>
     <p:spTree>
       <p:nvGrpSpPr>
@@ -7380,7 +7535,14 @@
         <p:cNvGrpSpPr/>
         <p:nvPr/>
       </p:nvGrpSpPr>
-      <p:grpSpPr/>
+      <p:grpSpPr>
+        <a:xfrm>
+          <a:off x="0" y="0"/>
+          <a:ext cx="0" cy="0"/>
+          <a:chOff x="0" y="0"/>
+          <a:chExt cx="0" cy="0"/>
+        </a:xfrm>
+      </p:grpSpPr>
       <p:sp>
         <p:nvSpPr>
           <p:cNvPr id="2" name="Rectangle 1"/>
@@ -7421,6 +7583,7 @@
           <a:lstStyle/>
           <a:p>
             <a:pPr algn="ctr"/>
+            <a:endParaRPr/>
           </a:p>
         </p:txBody>
       </p:sp>
@@ -7464,6 +7627,7 @@
           <a:lstStyle/>
           <a:p>
             <a:pPr algn="ctr"/>
+            <a:endParaRPr/>
           </a:p>
         </p:txBody>
       </p:sp>
@@ -7507,6 +7671,7 @@
           <a:lstStyle/>
           <a:p>
             <a:pPr algn="ctr"/>
+            <a:endParaRPr/>
           </a:p>
         </p:txBody>
       </p:sp>
@@ -7620,6 +7785,7 @@
           <a:lstStyle/>
           <a:p>
             <a:pPr algn="ctr"/>
+            <a:endParaRPr/>
           </a:p>
         </p:txBody>
       </p:sp>
@@ -7663,6 +7829,7 @@
           <a:lstStyle/>
           <a:p>
             <a:pPr algn="ctr"/>
+            <a:endParaRPr/>
           </a:p>
         </p:txBody>
       </p:sp>
@@ -7946,6 +8113,7 @@
           <a:lstStyle/>
           <a:p>
             <a:pPr algn="ctr"/>
+            <a:endParaRPr/>
           </a:p>
         </p:txBody>
       </p:sp>
@@ -8025,6 +8193,7 @@
           <a:lstStyle/>
           <a:p>
             <a:pPr algn="ctr"/>
+            <a:endParaRPr/>
           </a:p>
         </p:txBody>
       </p:sp>
@@ -8104,6 +8273,7 @@
           <a:lstStyle/>
           <a:p>
             <a:pPr algn="ctr"/>
+            <a:endParaRPr/>
           </a:p>
         </p:txBody>
       </p:sp>
@@ -8183,6 +8353,7 @@
           <a:lstStyle/>
           <a:p>
             <a:pPr algn="ctr"/>
+            <a:endParaRPr/>
           </a:p>
         </p:txBody>
       </p:sp>
@@ -8262,6 +8433,7 @@
           <a:lstStyle/>
           <a:p>
             <a:pPr algn="ctr"/>
+            <a:endParaRPr/>
           </a:p>
         </p:txBody>
       </p:sp>
@@ -8305,6 +8477,7 @@
           <a:lstStyle/>
           <a:p>
             <a:pPr algn="ctr"/>
+            <a:endParaRPr/>
           </a:p>
         </p:txBody>
       </p:sp>
@@ -8384,6 +8557,7 @@
           <a:lstStyle/>
           <a:p>
             <a:pPr algn="ctr"/>
+            <a:endParaRPr/>
           </a:p>
         </p:txBody>
       </p:sp>
@@ -8497,6 +8671,7 @@
           <a:lstStyle/>
           <a:p>
             <a:pPr algn="ctr"/>
+            <a:endParaRPr/>
           </a:p>
         </p:txBody>
       </p:sp>
@@ -8610,6 +8785,7 @@
           <a:lstStyle/>
           <a:p>
             <a:pPr algn="ctr"/>
+            <a:endParaRPr/>
           </a:p>
         </p:txBody>
       </p:sp>
@@ -8723,6 +8899,7 @@
           <a:lstStyle/>
           <a:p>
             <a:pPr algn="ctr"/>
+            <a:endParaRPr/>
           </a:p>
         </p:txBody>
       </p:sp>
@@ -8836,6 +9013,7 @@
           <a:lstStyle/>
           <a:p>
             <a:pPr algn="ctr"/>
+            <a:endParaRPr/>
           </a:p>
         </p:txBody>
       </p:sp>
@@ -8949,6 +9127,7 @@
           <a:lstStyle/>
           <a:p>
             <a:pPr algn="ctr"/>
+            <a:endParaRPr/>
           </a:p>
         </p:txBody>
       </p:sp>
@@ -9062,6 +9241,7 @@
           <a:lstStyle/>
           <a:p>
             <a:pPr algn="ctr"/>
+            <a:endParaRPr/>
           </a:p>
         </p:txBody>
       </p:sp>
@@ -9105,6 +9285,7 @@
           <a:lstStyle/>
           <a:p>
             <a:pPr algn="ctr"/>
+            <a:endParaRPr/>
           </a:p>
         </p:txBody>
       </p:sp>
@@ -9184,6 +9365,7 @@
           <a:lstStyle/>
           <a:p>
             <a:pPr algn="ctr"/>
+            <a:endParaRPr/>
           </a:p>
         </p:txBody>
       </p:sp>
@@ -9297,6 +9479,7 @@
           <a:lstStyle/>
           <a:p>
             <a:pPr algn="ctr"/>
+            <a:endParaRPr/>
           </a:p>
         </p:txBody>
       </p:sp>
@@ -9377,7 +9560,7 @@
 </file>
 
 <file path=ppt/slides/slide13.xml><?xml version="1.0" encoding="utf-8"?>
-<p:sld xmlns:a="http://schemas.openxmlformats.org/drawingml/2006/main" xmlns:p="http://schemas.openxmlformats.org/presentationml/2006/main" xmlns:r="http://schemas.openxmlformats.org/officeDocument/2006/relationships">
+<p:sld xmlns:a="http://schemas.openxmlformats.org/drawingml/2006/main" xmlns:r="http://schemas.openxmlformats.org/officeDocument/2006/relationships" xmlns:p="http://schemas.openxmlformats.org/presentationml/2006/main">
   <p:cSld>
     <p:spTree>
       <p:nvGrpSpPr>
@@ -9385,7 +9568,14 @@
         <p:cNvGrpSpPr/>
         <p:nvPr/>
       </p:nvGrpSpPr>
-      <p:grpSpPr/>
+      <p:grpSpPr>
+        <a:xfrm>
+          <a:off x="0" y="0"/>
+          <a:ext cx="0" cy="0"/>
+          <a:chOff x="0" y="0"/>
+          <a:chExt cx="0" cy="0"/>
+        </a:xfrm>
+      </p:grpSpPr>
       <p:sp>
         <p:nvSpPr>
           <p:cNvPr id="2" name="Rectangle 1"/>
@@ -9426,6 +9616,7 @@
           <a:lstStyle/>
           <a:p>
             <a:pPr algn="ctr"/>
+            <a:endParaRPr/>
           </a:p>
         </p:txBody>
       </p:sp>
@@ -9469,6 +9660,7 @@
           <a:lstStyle/>
           <a:p>
             <a:pPr algn="ctr"/>
+            <a:endParaRPr/>
           </a:p>
         </p:txBody>
       </p:sp>
@@ -9512,6 +9704,7 @@
           <a:lstStyle/>
           <a:p>
             <a:pPr algn="ctr"/>
+            <a:endParaRPr/>
           </a:p>
         </p:txBody>
       </p:sp>
@@ -9623,6 +9816,7 @@
           <a:lstStyle/>
           <a:p>
             <a:pPr algn="ctr"/>
+            <a:endParaRPr/>
           </a:p>
         </p:txBody>
       </p:sp>
@@ -9734,6 +9928,7 @@
           <a:lstStyle/>
           <a:p>
             <a:pPr algn="ctr"/>
+            <a:endParaRPr/>
           </a:p>
         </p:txBody>
       </p:sp>
@@ -9845,6 +10040,7 @@
           <a:lstStyle/>
           <a:p>
             <a:pPr algn="ctr"/>
+            <a:endParaRPr/>
           </a:p>
         </p:txBody>
       </p:sp>
@@ -9956,6 +10152,7 @@
           <a:lstStyle/>
           <a:p>
             <a:pPr algn="ctr"/>
+            <a:endParaRPr/>
           </a:p>
         </p:txBody>
       </p:sp>
@@ -10067,6 +10264,7 @@
           <a:lstStyle/>
           <a:p>
             <a:pPr algn="ctr"/>
+            <a:endParaRPr/>
           </a:p>
         </p:txBody>
       </p:sp>
@@ -10178,6 +10376,7 @@
           <a:lstStyle/>
           <a:p>
             <a:pPr algn="ctr"/>
+            <a:endParaRPr/>
           </a:p>
         </p:txBody>
       </p:sp>
@@ -10291,6 +10490,7 @@
           <a:lstStyle/>
           <a:p>
             <a:pPr algn="ctr"/>
+            <a:endParaRPr/>
           </a:p>
         </p:txBody>
       </p:sp>
@@ -10370,6 +10570,7 @@
           <a:lstStyle/>
           <a:p>
             <a:pPr algn="ctr"/>
+            <a:endParaRPr/>
           </a:p>
         </p:txBody>
       </p:sp>
@@ -10449,6 +10650,7 @@
           <a:lstStyle/>
           <a:p>
             <a:pPr algn="ctr"/>
+            <a:endParaRPr/>
           </a:p>
         </p:txBody>
       </p:sp>
@@ -10528,6 +10730,7 @@
           <a:lstStyle/>
           <a:p>
             <a:pPr algn="ctr"/>
+            <a:endParaRPr/>
           </a:p>
         </p:txBody>
       </p:sp>
@@ -10607,6 +10810,7 @@
           <a:lstStyle/>
           <a:p>
             <a:pPr algn="ctr"/>
+            <a:endParaRPr/>
           </a:p>
         </p:txBody>
       </p:sp>
@@ -10686,6 +10890,7 @@
           <a:lstStyle/>
           <a:p>
             <a:pPr algn="ctr"/>
+            <a:endParaRPr/>
           </a:p>
         </p:txBody>
       </p:sp>
@@ -10765,6 +10970,7 @@
           <a:lstStyle/>
           <a:p>
             <a:pPr algn="ctr"/>
+            <a:endParaRPr/>
           </a:p>
         </p:txBody>
       </p:sp>
@@ -10844,6 +11050,7 @@
           <a:lstStyle/>
           <a:p>
             <a:pPr algn="ctr"/>
+            <a:endParaRPr/>
           </a:p>
         </p:txBody>
       </p:sp>
@@ -10923,6 +11130,7 @@
           <a:lstStyle/>
           <a:p>
             <a:pPr algn="ctr"/>
+            <a:endParaRPr/>
           </a:p>
         </p:txBody>
       </p:sp>
@@ -11002,6 +11210,7 @@
           <a:lstStyle/>
           <a:p>
             <a:pPr algn="ctr"/>
+            <a:endParaRPr/>
           </a:p>
         </p:txBody>
       </p:sp>
@@ -11081,6 +11290,7 @@
           <a:lstStyle/>
           <a:p>
             <a:pPr algn="ctr"/>
+            <a:endParaRPr/>
           </a:p>
         </p:txBody>
       </p:sp>
@@ -11160,6 +11370,7 @@
           <a:lstStyle/>
           <a:p>
             <a:pPr algn="ctr"/>
+            <a:endParaRPr/>
           </a:p>
         </p:txBody>
       </p:sp>
@@ -11239,6 +11450,7 @@
           <a:lstStyle/>
           <a:p>
             <a:pPr algn="ctr"/>
+            <a:endParaRPr/>
           </a:p>
         </p:txBody>
       </p:sp>
@@ -11318,6 +11530,7 @@
           <a:lstStyle/>
           <a:p>
             <a:pPr algn="ctr"/>
+            <a:endParaRPr/>
           </a:p>
         </p:txBody>
       </p:sp>
@@ -11364,7 +11577,7 @@
 </file>
 
 <file path=ppt/slides/slide14.xml><?xml version="1.0" encoding="utf-8"?>
-<p:sld xmlns:a="http://schemas.openxmlformats.org/drawingml/2006/main" xmlns:p="http://schemas.openxmlformats.org/presentationml/2006/main" xmlns:r="http://schemas.openxmlformats.org/officeDocument/2006/relationships">
+<p:sld xmlns:a="http://schemas.openxmlformats.org/drawingml/2006/main" xmlns:r="http://schemas.openxmlformats.org/officeDocument/2006/relationships" xmlns:p="http://schemas.openxmlformats.org/presentationml/2006/main">
   <p:cSld>
     <p:spTree>
       <p:nvGrpSpPr>
@@ -11372,7 +11585,14 @@
         <p:cNvGrpSpPr/>
         <p:nvPr/>
       </p:nvGrpSpPr>
-      <p:grpSpPr/>
+      <p:grpSpPr>
+        <a:xfrm>
+          <a:off x="0" y="0"/>
+          <a:ext cx="0" cy="0"/>
+          <a:chOff x="0" y="0"/>
+          <a:chExt cx="0" cy="0"/>
+        </a:xfrm>
+      </p:grpSpPr>
       <p:sp>
         <p:nvSpPr>
           <p:cNvPr id="2" name="Rectangle 1"/>
@@ -11413,6 +11633,7 @@
           <a:lstStyle/>
           <a:p>
             <a:pPr algn="ctr"/>
+            <a:endParaRPr/>
           </a:p>
         </p:txBody>
       </p:sp>
@@ -11456,6 +11677,7 @@
           <a:lstStyle/>
           <a:p>
             <a:pPr algn="ctr"/>
+            <a:endParaRPr/>
           </a:p>
         </p:txBody>
       </p:sp>
@@ -11499,6 +11721,7 @@
           <a:lstStyle/>
           <a:p>
             <a:pPr algn="ctr"/>
+            <a:endParaRPr/>
           </a:p>
         </p:txBody>
       </p:sp>
@@ -11610,6 +11833,7 @@
           <a:lstStyle/>
           <a:p>
             <a:pPr algn="ctr"/>
+            <a:endParaRPr/>
           </a:p>
         </p:txBody>
       </p:sp>
@@ -11757,6 +11981,7 @@
           <a:lstStyle/>
           <a:p>
             <a:pPr algn="ctr"/>
+            <a:endParaRPr/>
           </a:p>
         </p:txBody>
       </p:sp>
@@ -11834,6 +12059,7 @@
           <a:lstStyle/>
           <a:p>
             <a:pPr algn="ctr"/>
+            <a:endParaRPr/>
           </a:p>
         </p:txBody>
       </p:sp>
@@ -11947,6 +12173,7 @@
           <a:lstStyle/>
           <a:p>
             <a:pPr algn="ctr"/>
+            <a:endParaRPr/>
           </a:p>
         </p:txBody>
       </p:sp>
@@ -12024,6 +12251,7 @@
           <a:lstStyle/>
           <a:p>
             <a:pPr algn="ctr"/>
+            <a:endParaRPr/>
           </a:p>
         </p:txBody>
       </p:sp>
@@ -12137,6 +12365,7 @@
           <a:lstStyle/>
           <a:p>
             <a:pPr algn="ctr"/>
+            <a:endParaRPr/>
           </a:p>
         </p:txBody>
       </p:sp>
@@ -12214,6 +12443,7 @@
           <a:lstStyle/>
           <a:p>
             <a:pPr algn="ctr"/>
+            <a:endParaRPr/>
           </a:p>
         </p:txBody>
       </p:sp>
@@ -12327,6 +12557,7 @@
           <a:lstStyle/>
           <a:p>
             <a:pPr algn="ctr"/>
+            <a:endParaRPr/>
           </a:p>
         </p:txBody>
       </p:sp>
@@ -12404,6 +12635,7 @@
           <a:lstStyle/>
           <a:p>
             <a:pPr algn="ctr"/>
+            <a:endParaRPr/>
           </a:p>
         </p:txBody>
       </p:sp>
@@ -12517,6 +12749,7 @@
           <a:lstStyle/>
           <a:p>
             <a:pPr algn="ctr"/>
+            <a:endParaRPr/>
           </a:p>
         </p:txBody>
       </p:sp>
@@ -12594,6 +12827,7 @@
           <a:lstStyle/>
           <a:p>
             <a:pPr algn="ctr"/>
+            <a:endParaRPr/>
           </a:p>
         </p:txBody>
       </p:sp>
@@ -12707,6 +12941,7 @@
           <a:lstStyle/>
           <a:p>
             <a:pPr algn="ctr"/>
+            <a:endParaRPr/>
           </a:p>
         </p:txBody>
       </p:sp>
@@ -12784,6 +13019,7 @@
           <a:lstStyle/>
           <a:p>
             <a:pPr algn="ctr"/>
+            <a:endParaRPr/>
           </a:p>
         </p:txBody>
       </p:sp>
@@ -12895,6 +13131,7 @@
           <a:lstStyle/>
           <a:p>
             <a:pPr algn="ctr"/>
+            <a:endParaRPr/>
           </a:p>
         </p:txBody>
       </p:sp>
@@ -13006,6 +13243,7 @@
           <a:lstStyle/>
           <a:p>
             <a:pPr algn="ctr"/>
+            <a:endParaRPr/>
           </a:p>
         </p:txBody>
       </p:sp>
@@ -13117,6 +13355,7 @@
           <a:lstStyle/>
           <a:p>
             <a:pPr algn="ctr"/>
+            <a:endParaRPr/>
           </a:p>
         </p:txBody>
       </p:sp>
@@ -13230,6 +13469,7 @@
           <a:lstStyle/>
           <a:p>
             <a:pPr algn="ctr"/>
+            <a:endParaRPr/>
           </a:p>
         </p:txBody>
       </p:sp>
@@ -13311,7 +13551,7 @@
 </file>
 
 <file path=ppt/slides/slide15.xml><?xml version="1.0" encoding="utf-8"?>
-<p:sld xmlns:a="http://schemas.openxmlformats.org/drawingml/2006/main" xmlns:p="http://schemas.openxmlformats.org/presentationml/2006/main" xmlns:r="http://schemas.openxmlformats.org/officeDocument/2006/relationships">
+<p:sld xmlns:a="http://schemas.openxmlformats.org/drawingml/2006/main" xmlns:r="http://schemas.openxmlformats.org/officeDocument/2006/relationships" xmlns:p="http://schemas.openxmlformats.org/presentationml/2006/main">
   <p:cSld>
     <p:spTree>
       <p:nvGrpSpPr>
@@ -13319,7 +13559,14 @@
         <p:cNvGrpSpPr/>
         <p:nvPr/>
       </p:nvGrpSpPr>
-      <p:grpSpPr/>
+      <p:grpSpPr>
+        <a:xfrm>
+          <a:off x="0" y="0"/>
+          <a:ext cx="0" cy="0"/>
+          <a:chOff x="0" y="0"/>
+          <a:chExt cx="0" cy="0"/>
+        </a:xfrm>
+      </p:grpSpPr>
       <p:sp>
         <p:nvSpPr>
           <p:cNvPr id="2" name="Rectangle 1"/>
@@ -13360,6 +13607,7 @@
           <a:lstStyle/>
           <a:p>
             <a:pPr algn="ctr"/>
+            <a:endParaRPr/>
           </a:p>
         </p:txBody>
       </p:sp>
@@ -13403,6 +13651,7 @@
           <a:lstStyle/>
           <a:p>
             <a:pPr algn="ctr"/>
+            <a:endParaRPr/>
           </a:p>
         </p:txBody>
       </p:sp>
@@ -13446,6 +13695,7 @@
           <a:lstStyle/>
           <a:p>
             <a:pPr algn="ctr"/>
+            <a:endParaRPr/>
           </a:p>
         </p:txBody>
       </p:sp>
@@ -13559,6 +13809,7 @@
           <a:lstStyle/>
           <a:p>
             <a:pPr algn="ctr"/>
+            <a:endParaRPr/>
           </a:p>
         </p:txBody>
       </p:sp>
@@ -13672,6 +13923,7 @@
           <a:lstStyle/>
           <a:p>
             <a:pPr algn="ctr"/>
+            <a:endParaRPr/>
           </a:p>
         </p:txBody>
       </p:sp>
@@ -13715,6 +13967,7 @@
           <a:lstStyle/>
           <a:p>
             <a:pPr algn="ctr"/>
+            <a:endParaRPr/>
           </a:p>
         </p:txBody>
       </p:sp>
@@ -13865,6 +14118,7 @@
           <a:lstStyle/>
           <a:p>
             <a:pPr algn="ctr"/>
+            <a:endParaRPr/>
           </a:p>
         </p:txBody>
       </p:sp>
@@ -13908,6 +14162,7 @@
           <a:lstStyle/>
           <a:p>
             <a:pPr algn="ctr"/>
+            <a:endParaRPr/>
           </a:p>
         </p:txBody>
       </p:sp>
@@ -14058,6 +14313,7 @@
           <a:lstStyle/>
           <a:p>
             <a:pPr algn="ctr"/>
+            <a:endParaRPr/>
           </a:p>
         </p:txBody>
       </p:sp>
@@ -14101,6 +14357,7 @@
           <a:lstStyle/>
           <a:p>
             <a:pPr algn="ctr"/>
+            <a:endParaRPr/>
           </a:p>
         </p:txBody>
       </p:sp>
@@ -14251,6 +14508,7 @@
           <a:lstStyle/>
           <a:p>
             <a:pPr algn="ctr"/>
+            <a:endParaRPr/>
           </a:p>
         </p:txBody>
       </p:sp>
@@ -14294,6 +14552,7 @@
           <a:lstStyle/>
           <a:p>
             <a:pPr algn="ctr"/>
+            <a:endParaRPr/>
           </a:p>
         </p:txBody>
       </p:sp>
@@ -14411,7 +14670,7 @@
 </file>
 
 <file path=ppt/slides/slide16.xml><?xml version="1.0" encoding="utf-8"?>
-<p:sld xmlns:a="http://schemas.openxmlformats.org/drawingml/2006/main" xmlns:p="http://schemas.openxmlformats.org/presentationml/2006/main" xmlns:r="http://schemas.openxmlformats.org/officeDocument/2006/relationships">
+<p:sld xmlns:a="http://schemas.openxmlformats.org/drawingml/2006/main" xmlns:r="http://schemas.openxmlformats.org/officeDocument/2006/relationships" xmlns:p="http://schemas.openxmlformats.org/presentationml/2006/main">
   <p:cSld>
     <p:spTree>
       <p:nvGrpSpPr>
@@ -14419,7 +14678,14 @@
         <p:cNvGrpSpPr/>
         <p:nvPr/>
       </p:nvGrpSpPr>
-      <p:grpSpPr/>
+      <p:grpSpPr>
+        <a:xfrm>
+          <a:off x="0" y="0"/>
+          <a:ext cx="0" cy="0"/>
+          <a:chOff x="0" y="0"/>
+          <a:chExt cx="0" cy="0"/>
+        </a:xfrm>
+      </p:grpSpPr>
       <p:sp>
         <p:nvSpPr>
           <p:cNvPr id="2" name="Rectangle 1"/>
@@ -14428,7 +14694,7 @@
         </p:nvSpPr>
         <p:spPr>
           <a:xfrm>
-            <a:off x="0" y="0"/>
+            <a:off x="-45720" y="182880"/>
             <a:ext cx="12191695" cy="6858000"/>
           </a:xfrm>
           <a:prstGeom prst="rect">
@@ -14460,6 +14726,7 @@
           <a:lstStyle/>
           <a:p>
             <a:pPr algn="ctr"/>
+            <a:endParaRPr/>
           </a:p>
         </p:txBody>
       </p:sp>
@@ -14503,6 +14770,7 @@
           <a:lstStyle/>
           <a:p>
             <a:pPr algn="ctr"/>
+            <a:endParaRPr/>
           </a:p>
         </p:txBody>
       </p:sp>
@@ -14546,6 +14814,7 @@
           <a:lstStyle/>
           <a:p>
             <a:pPr algn="ctr"/>
+            <a:endParaRPr/>
           </a:p>
         </p:txBody>
       </p:sp>
@@ -14659,6 +14928,7 @@
           <a:lstStyle/>
           <a:p>
             <a:pPr algn="ctr"/>
+            <a:endParaRPr/>
           </a:p>
         </p:txBody>
       </p:sp>
@@ -14806,6 +15076,7 @@
           <a:lstStyle/>
           <a:p>
             <a:pPr algn="ctr"/>
+            <a:endParaRPr/>
           </a:p>
         </p:txBody>
       </p:sp>
@@ -14953,6 +15224,7 @@
           <a:lstStyle/>
           <a:p>
             <a:pPr algn="ctr"/>
+            <a:endParaRPr/>
           </a:p>
         </p:txBody>
       </p:sp>
@@ -15100,6 +15372,7 @@
           <a:lstStyle/>
           <a:p>
             <a:pPr algn="ctr"/>
+            <a:endParaRPr/>
           </a:p>
         </p:txBody>
       </p:sp>
@@ -15214,7 +15487,7 @@
         <p:spPr>
           <a:xfrm>
             <a:off x="10762488" y="914400"/>
-            <a:ext cx="2240280" cy="804672"/>
+            <a:ext cx="1643855" cy="804672"/>
           </a:xfrm>
           <a:prstGeom prst="roundRect">
             <a:avLst/>
@@ -15247,6 +15520,7 @@
           <a:lstStyle/>
           <a:p>
             <a:pPr algn="ctr"/>
+            <a:endParaRPr/>
           </a:p>
         </p:txBody>
       </p:sp>
@@ -15394,6 +15668,7 @@
           <a:lstStyle/>
           <a:p>
             <a:pPr algn="ctr"/>
+            <a:endParaRPr/>
           </a:p>
         </p:txBody>
       </p:sp>
@@ -15541,6 +15816,7 @@
           <a:lstStyle/>
           <a:p>
             <a:pPr algn="ctr"/>
+            <a:endParaRPr/>
           </a:p>
         </p:txBody>
       </p:sp>
@@ -15688,6 +15964,7 @@
           <a:lstStyle/>
           <a:p>
             <a:pPr algn="ctr"/>
+            <a:endParaRPr/>
           </a:p>
         </p:txBody>
       </p:sp>
@@ -15835,6 +16112,7 @@
           <a:lstStyle/>
           <a:p>
             <a:pPr algn="ctr"/>
+            <a:endParaRPr/>
           </a:p>
         </p:txBody>
       </p:sp>
@@ -15949,7 +16227,7 @@
         <p:spPr>
           <a:xfrm>
             <a:off x="10762488" y="1975104"/>
-            <a:ext cx="2240280" cy="804672"/>
+            <a:ext cx="1685151" cy="804672"/>
           </a:xfrm>
           <a:prstGeom prst="roundRect">
             <a:avLst/>
@@ -15982,6 +16260,7 @@
           <a:lstStyle/>
           <a:p>
             <a:pPr algn="ctr"/>
+            <a:endParaRPr/>
           </a:p>
         </p:txBody>
       </p:sp>
@@ -16129,6 +16408,7 @@
           <a:lstStyle/>
           <a:p>
             <a:pPr algn="ctr"/>
+            <a:endParaRPr/>
           </a:p>
         </p:txBody>
       </p:sp>
@@ -16276,6 +16556,7 @@
           <a:lstStyle/>
           <a:p>
             <a:pPr algn="ctr"/>
+            <a:endParaRPr/>
           </a:p>
         </p:txBody>
       </p:sp>
@@ -16423,6 +16704,7 @@
           <a:lstStyle/>
           <a:p>
             <a:pPr algn="ctr"/>
+            <a:endParaRPr/>
           </a:p>
         </p:txBody>
       </p:sp>
@@ -16570,6 +16852,7 @@
           <a:lstStyle/>
           <a:p>
             <a:pPr algn="ctr"/>
+            <a:endParaRPr/>
           </a:p>
         </p:txBody>
       </p:sp>
@@ -16684,7 +16967,7 @@
         <p:spPr>
           <a:xfrm>
             <a:off x="10762488" y="3035808"/>
-            <a:ext cx="2240280" cy="804672"/>
+            <a:ext cx="1685151" cy="804672"/>
           </a:xfrm>
           <a:prstGeom prst="roundRect">
             <a:avLst/>
@@ -16717,6 +17000,7 @@
           <a:lstStyle/>
           <a:p>
             <a:pPr algn="ctr"/>
+            <a:endParaRPr/>
           </a:p>
         </p:txBody>
       </p:sp>
@@ -16796,7 +17080,7 @@
         </p:nvSpPr>
         <p:spPr>
           <a:xfrm>
-            <a:off x="10853928" y="3566160"/>
+            <a:off x="10808208" y="3566160"/>
             <a:ext cx="2103120" cy="256032"/>
           </a:xfrm>
           <a:prstGeom prst="rect">
@@ -16864,6 +17148,7 @@
           <a:lstStyle/>
           <a:p>
             <a:pPr algn="ctr"/>
+            <a:endParaRPr/>
           </a:p>
         </p:txBody>
       </p:sp>
@@ -16909,6 +17194,7 @@
           <a:lstStyle/>
           <a:p>
             <a:pPr algn="ctr"/>
+            <a:endParaRPr/>
           </a:p>
         </p:txBody>
       </p:sp>
@@ -16988,6 +17274,7 @@
           <a:lstStyle/>
           <a:p>
             <a:pPr algn="ctr"/>
+            <a:endParaRPr/>
           </a:p>
         </p:txBody>
       </p:sp>
@@ -17067,6 +17354,7 @@
           <a:lstStyle/>
           <a:p>
             <a:pPr algn="ctr"/>
+            <a:endParaRPr/>
           </a:p>
         </p:txBody>
       </p:sp>
@@ -17146,6 +17434,7 @@
           <a:lstStyle/>
           <a:p>
             <a:pPr algn="ctr"/>
+            <a:endParaRPr/>
           </a:p>
         </p:txBody>
       </p:sp>
@@ -17191,8 +17480,8 @@
         </p:nvSpPr>
         <p:spPr>
           <a:xfrm>
-            <a:off x="7772400" y="6144768"/>
-            <a:ext cx="4114800" cy="384048"/>
+            <a:off x="7848295" y="5803979"/>
+            <a:ext cx="4114800" cy="238527"/>
           </a:xfrm>
           <a:prstGeom prst="rect">
             <a:avLst/>
@@ -17207,7 +17496,7 @@
           <a:p>
             <a:pPr algn="r"/>
             <a:r>
-              <a:rPr sz="950" b="0" i="0">
+              <a:rPr sz="950" b="0" i="0" dirty="0">
                 <a:solidFill>
                   <a:srgbClr val="616161"/>
                 </a:solidFill>
@@ -17226,7 +17515,7 @@
 </file>
 
 <file path=ppt/slides/slide17.xml><?xml version="1.0" encoding="utf-8"?>
-<p:sld xmlns:a="http://schemas.openxmlformats.org/drawingml/2006/main" xmlns:p="http://schemas.openxmlformats.org/presentationml/2006/main" xmlns:r="http://schemas.openxmlformats.org/officeDocument/2006/relationships">
+<p:sld xmlns:a="http://schemas.openxmlformats.org/drawingml/2006/main" xmlns:r="http://schemas.openxmlformats.org/officeDocument/2006/relationships" xmlns:p="http://schemas.openxmlformats.org/presentationml/2006/main">
   <p:cSld>
     <p:spTree>
       <p:nvGrpSpPr>
@@ -17234,7 +17523,14 @@
         <p:cNvGrpSpPr/>
         <p:nvPr/>
       </p:nvGrpSpPr>
-      <p:grpSpPr/>
+      <p:grpSpPr>
+        <a:xfrm>
+          <a:off x="0" y="0"/>
+          <a:ext cx="0" cy="0"/>
+          <a:chOff x="0" y="0"/>
+          <a:chExt cx="0" cy="0"/>
+        </a:xfrm>
+      </p:grpSpPr>
       <p:sp>
         <p:nvSpPr>
           <p:cNvPr id="2" name="Rectangle 1"/>
@@ -17275,6 +17571,7 @@
           <a:lstStyle/>
           <a:p>
             <a:pPr algn="ctr"/>
+            <a:endParaRPr/>
           </a:p>
         </p:txBody>
       </p:sp>
@@ -17318,6 +17615,7 @@
           <a:lstStyle/>
           <a:p>
             <a:pPr algn="ctr"/>
+            <a:endParaRPr/>
           </a:p>
         </p:txBody>
       </p:sp>
@@ -17361,6 +17659,7 @@
           <a:lstStyle/>
           <a:p>
             <a:pPr algn="ctr"/>
+            <a:endParaRPr/>
           </a:p>
         </p:txBody>
       </p:sp>
@@ -17474,6 +17773,7 @@
           <a:lstStyle/>
           <a:p>
             <a:pPr algn="ctr"/>
+            <a:endParaRPr/>
           </a:p>
         </p:txBody>
       </p:sp>
@@ -17517,6 +17817,7 @@
           <a:lstStyle/>
           <a:p>
             <a:pPr algn="ctr"/>
+            <a:endParaRPr/>
           </a:p>
         </p:txBody>
       </p:sp>
@@ -17628,6 +17929,7 @@
           <a:lstStyle/>
           <a:p>
             <a:pPr algn="ctr"/>
+            <a:endParaRPr/>
           </a:p>
         </p:txBody>
       </p:sp>
@@ -17911,6 +18213,7 @@
           <a:lstStyle/>
           <a:p>
             <a:pPr algn="ctr"/>
+            <a:endParaRPr/>
           </a:p>
         </p:txBody>
       </p:sp>
@@ -17954,6 +18257,7 @@
           <a:lstStyle/>
           <a:p>
             <a:pPr algn="ctr"/>
+            <a:endParaRPr/>
           </a:p>
         </p:txBody>
       </p:sp>
@@ -18065,6 +18369,7 @@
           <a:lstStyle/>
           <a:p>
             <a:pPr algn="ctr"/>
+            <a:endParaRPr/>
           </a:p>
         </p:txBody>
       </p:sp>
@@ -18315,7 +18620,7 @@
 </file>
 
 <file path=ppt/slides/slide18.xml><?xml version="1.0" encoding="utf-8"?>
-<p:sld xmlns:a="http://schemas.openxmlformats.org/drawingml/2006/main" xmlns:p="http://schemas.openxmlformats.org/presentationml/2006/main" xmlns:r="http://schemas.openxmlformats.org/officeDocument/2006/relationships">
+<p:sld xmlns:a="http://schemas.openxmlformats.org/drawingml/2006/main" xmlns:r="http://schemas.openxmlformats.org/officeDocument/2006/relationships" xmlns:p="http://schemas.openxmlformats.org/presentationml/2006/main">
   <p:cSld>
     <p:spTree>
       <p:nvGrpSpPr>
@@ -18323,7 +18628,14 @@
         <p:cNvGrpSpPr/>
         <p:nvPr/>
       </p:nvGrpSpPr>
-      <p:grpSpPr/>
+      <p:grpSpPr>
+        <a:xfrm>
+          <a:off x="0" y="0"/>
+          <a:ext cx="0" cy="0"/>
+          <a:chOff x="0" y="0"/>
+          <a:chExt cx="0" cy="0"/>
+        </a:xfrm>
+      </p:grpSpPr>
       <p:sp>
         <p:nvSpPr>
           <p:cNvPr id="2" name="Rectangle 1"/>
@@ -18364,6 +18676,7 @@
           <a:lstStyle/>
           <a:p>
             <a:pPr algn="ctr"/>
+            <a:endParaRPr/>
           </a:p>
         </p:txBody>
       </p:sp>
@@ -18407,6 +18720,7 @@
           <a:lstStyle/>
           <a:p>
             <a:pPr algn="ctr"/>
+            <a:endParaRPr/>
           </a:p>
         </p:txBody>
       </p:sp>
@@ -18450,6 +18764,7 @@
           <a:lstStyle/>
           <a:p>
             <a:pPr algn="ctr"/>
+            <a:endParaRPr/>
           </a:p>
         </p:txBody>
       </p:sp>
@@ -18561,6 +18876,7 @@
           <a:lstStyle/>
           <a:p>
             <a:pPr algn="ctr"/>
+            <a:endParaRPr/>
           </a:p>
         </p:txBody>
       </p:sp>
@@ -18742,6 +19058,7 @@
           <a:lstStyle/>
           <a:p>
             <a:pPr algn="ctr"/>
+            <a:endParaRPr/>
           </a:p>
         </p:txBody>
       </p:sp>
@@ -18923,6 +19240,7 @@
           <a:lstStyle/>
           <a:p>
             <a:pPr algn="ctr"/>
+            <a:endParaRPr/>
           </a:p>
         </p:txBody>
       </p:sp>
@@ -19104,6 +19422,7 @@
           <a:lstStyle/>
           <a:p>
             <a:pPr algn="ctr"/>
+            <a:endParaRPr/>
           </a:p>
         </p:txBody>
       </p:sp>
@@ -19285,6 +19604,7 @@
           <a:lstStyle/>
           <a:p>
             <a:pPr algn="ctr"/>
+            <a:endParaRPr/>
           </a:p>
         </p:txBody>
       </p:sp>
@@ -19466,6 +19786,7 @@
           <a:lstStyle/>
           <a:p>
             <a:pPr algn="ctr"/>
+            <a:endParaRPr/>
           </a:p>
         </p:txBody>
       </p:sp>
@@ -19647,6 +19968,7 @@
           <a:lstStyle/>
           <a:p>
             <a:pPr algn="ctr"/>
+            <a:endParaRPr/>
           </a:p>
         </p:txBody>
       </p:sp>
@@ -19828,6 +20150,7 @@
           <a:lstStyle/>
           <a:p>
             <a:pPr algn="ctr"/>
+            <a:endParaRPr/>
           </a:p>
         </p:txBody>
       </p:sp>
@@ -19976,7 +20299,7 @@
 </file>
 
 <file path=ppt/slides/slide19.xml><?xml version="1.0" encoding="utf-8"?>
-<p:sld xmlns:a="http://schemas.openxmlformats.org/drawingml/2006/main" xmlns:p="http://schemas.openxmlformats.org/presentationml/2006/main" xmlns:r="http://schemas.openxmlformats.org/officeDocument/2006/relationships">
+<p:sld xmlns:a="http://schemas.openxmlformats.org/drawingml/2006/main" xmlns:r="http://schemas.openxmlformats.org/officeDocument/2006/relationships" xmlns:p="http://schemas.openxmlformats.org/presentationml/2006/main">
   <p:cSld>
     <p:spTree>
       <p:nvGrpSpPr>
@@ -19984,7 +20307,14 @@
         <p:cNvGrpSpPr/>
         <p:nvPr/>
       </p:nvGrpSpPr>
-      <p:grpSpPr/>
+      <p:grpSpPr>
+        <a:xfrm>
+          <a:off x="0" y="0"/>
+          <a:ext cx="0" cy="0"/>
+          <a:chOff x="0" y="0"/>
+          <a:chExt cx="0" cy="0"/>
+        </a:xfrm>
+      </p:grpSpPr>
       <p:sp>
         <p:nvSpPr>
           <p:cNvPr id="2" name="Rectangle 1"/>
@@ -20025,6 +20355,7 @@
           <a:lstStyle/>
           <a:p>
             <a:pPr algn="ctr"/>
+            <a:endParaRPr/>
           </a:p>
         </p:txBody>
       </p:sp>
@@ -20068,6 +20399,7 @@
           <a:lstStyle/>
           <a:p>
             <a:pPr algn="ctr"/>
+            <a:endParaRPr/>
           </a:p>
         </p:txBody>
       </p:sp>
@@ -20111,6 +20443,7 @@
           <a:lstStyle/>
           <a:p>
             <a:pPr algn="ctr"/>
+            <a:endParaRPr/>
           </a:p>
         </p:txBody>
       </p:sp>
@@ -20224,6 +20557,7 @@
           <a:lstStyle/>
           <a:p>
             <a:pPr algn="ctr"/>
+            <a:endParaRPr/>
           </a:p>
         </p:txBody>
       </p:sp>
@@ -20267,6 +20601,7 @@
           <a:lstStyle/>
           <a:p>
             <a:pPr algn="ctr"/>
+            <a:endParaRPr/>
           </a:p>
         </p:txBody>
       </p:sp>
@@ -20310,6 +20645,7 @@
           <a:lstStyle/>
           <a:p>
             <a:pPr algn="ctr"/>
+            <a:endParaRPr/>
           </a:p>
         </p:txBody>
       </p:sp>
@@ -20423,6 +20759,7 @@
           <a:lstStyle/>
           <a:p>
             <a:pPr algn="ctr"/>
+            <a:endParaRPr/>
           </a:p>
         </p:txBody>
       </p:sp>
@@ -20502,6 +20839,7 @@
           <a:lstStyle/>
           <a:p>
             <a:pPr algn="ctr"/>
+            <a:endParaRPr/>
           </a:p>
         </p:txBody>
       </p:sp>
@@ -20581,6 +20919,7 @@
           <a:lstStyle/>
           <a:p>
             <a:pPr algn="ctr"/>
+            <a:endParaRPr/>
           </a:p>
         </p:txBody>
       </p:sp>
@@ -20624,6 +20963,7 @@
           <a:lstStyle/>
           <a:p>
             <a:pPr algn="ctr"/>
+            <a:endParaRPr/>
           </a:p>
         </p:txBody>
       </p:sp>
@@ -20667,6 +21007,7 @@
           <a:lstStyle/>
           <a:p>
             <a:pPr algn="ctr"/>
+            <a:endParaRPr/>
           </a:p>
         </p:txBody>
       </p:sp>
@@ -20780,6 +21121,7 @@
           <a:lstStyle/>
           <a:p>
             <a:pPr algn="ctr"/>
+            <a:endParaRPr/>
           </a:p>
         </p:txBody>
       </p:sp>
@@ -20859,6 +21201,7 @@
           <a:lstStyle/>
           <a:p>
             <a:pPr algn="ctr"/>
+            <a:endParaRPr/>
           </a:p>
         </p:txBody>
       </p:sp>
@@ -20938,6 +21281,7 @@
           <a:lstStyle/>
           <a:p>
             <a:pPr algn="ctr"/>
+            <a:endParaRPr/>
           </a:p>
         </p:txBody>
       </p:sp>
@@ -20981,6 +21325,7 @@
           <a:lstStyle/>
           <a:p>
             <a:pPr algn="ctr"/>
+            <a:endParaRPr/>
           </a:p>
         </p:txBody>
       </p:sp>
@@ -21024,6 +21369,7 @@
           <a:lstStyle/>
           <a:p>
             <a:pPr algn="ctr"/>
+            <a:endParaRPr/>
           </a:p>
         </p:txBody>
       </p:sp>
@@ -21137,6 +21483,7 @@
           <a:lstStyle/>
           <a:p>
             <a:pPr algn="ctr"/>
+            <a:endParaRPr/>
           </a:p>
         </p:txBody>
       </p:sp>
@@ -21216,6 +21563,7 @@
           <a:lstStyle/>
           <a:p>
             <a:pPr algn="ctr"/>
+            <a:endParaRPr/>
           </a:p>
         </p:txBody>
       </p:sp>
@@ -21295,6 +21643,7 @@
           <a:lstStyle/>
           <a:p>
             <a:pPr algn="ctr"/>
+            <a:endParaRPr/>
           </a:p>
         </p:txBody>
       </p:sp>
@@ -21338,6 +21687,7 @@
           <a:lstStyle/>
           <a:p>
             <a:pPr algn="ctr"/>
+            <a:endParaRPr/>
           </a:p>
         </p:txBody>
       </p:sp>
@@ -21381,6 +21731,7 @@
           <a:lstStyle/>
           <a:p>
             <a:pPr algn="ctr"/>
+            <a:endParaRPr/>
           </a:p>
         </p:txBody>
       </p:sp>
@@ -21494,6 +21845,7 @@
           <a:lstStyle/>
           <a:p>
             <a:pPr algn="ctr"/>
+            <a:endParaRPr/>
           </a:p>
         </p:txBody>
       </p:sp>
@@ -21573,6 +21925,7 @@
           <a:lstStyle/>
           <a:p>
             <a:pPr algn="ctr"/>
+            <a:endParaRPr/>
           </a:p>
         </p:txBody>
       </p:sp>
@@ -21619,7 +21972,7 @@
 </file>
 
 <file path=ppt/slides/slide2.xml><?xml version="1.0" encoding="utf-8"?>
-<p:sld xmlns:a="http://schemas.openxmlformats.org/drawingml/2006/main" xmlns:p="http://schemas.openxmlformats.org/presentationml/2006/main" xmlns:r="http://schemas.openxmlformats.org/officeDocument/2006/relationships">
+<p:sld xmlns:a="http://schemas.openxmlformats.org/drawingml/2006/main" xmlns:r="http://schemas.openxmlformats.org/officeDocument/2006/relationships" xmlns:p="http://schemas.openxmlformats.org/presentationml/2006/main">
   <p:cSld>
     <p:spTree>
       <p:nvGrpSpPr>
@@ -21627,7 +21980,14 @@
         <p:cNvGrpSpPr/>
         <p:nvPr/>
       </p:nvGrpSpPr>
-      <p:grpSpPr/>
+      <p:grpSpPr>
+        <a:xfrm>
+          <a:off x="0" y="0"/>
+          <a:ext cx="0" cy="0"/>
+          <a:chOff x="0" y="0"/>
+          <a:chExt cx="0" cy="0"/>
+        </a:xfrm>
+      </p:grpSpPr>
       <p:sp>
         <p:nvSpPr>
           <p:cNvPr id="2" name="Rectangle 1"/>
@@ -21668,6 +22028,7 @@
           <a:lstStyle/>
           <a:p>
             <a:pPr algn="ctr"/>
+            <a:endParaRPr/>
           </a:p>
         </p:txBody>
       </p:sp>
@@ -21711,6 +22072,7 @@
           <a:lstStyle/>
           <a:p>
             <a:pPr algn="ctr"/>
+            <a:endParaRPr/>
           </a:p>
         </p:txBody>
       </p:sp>
@@ -21754,6 +22116,7 @@
           <a:lstStyle/>
           <a:p>
             <a:pPr algn="ctr"/>
+            <a:endParaRPr/>
           </a:p>
         </p:txBody>
       </p:sp>
@@ -21867,6 +22230,7 @@
           <a:lstStyle/>
           <a:p>
             <a:pPr algn="ctr"/>
+            <a:endParaRPr/>
           </a:p>
         </p:txBody>
       </p:sp>
@@ -21910,6 +22274,7 @@
           <a:lstStyle/>
           <a:p>
             <a:pPr algn="ctr"/>
+            <a:endParaRPr/>
           </a:p>
         </p:txBody>
       </p:sp>
@@ -21989,6 +22354,7 @@
           <a:lstStyle/>
           <a:p>
             <a:pPr algn="ctr"/>
+            <a:endParaRPr/>
           </a:p>
         </p:txBody>
       </p:sp>
@@ -22032,6 +22398,7 @@
           <a:lstStyle/>
           <a:p>
             <a:pPr algn="ctr"/>
+            <a:endParaRPr/>
           </a:p>
         </p:txBody>
       </p:sp>
@@ -22111,6 +22478,7 @@
           <a:lstStyle/>
           <a:p>
             <a:pPr algn="ctr"/>
+            <a:endParaRPr/>
           </a:p>
         </p:txBody>
       </p:sp>
@@ -22154,6 +22522,7 @@
           <a:lstStyle/>
           <a:p>
             <a:pPr algn="ctr"/>
+            <a:endParaRPr/>
           </a:p>
         </p:txBody>
       </p:sp>
@@ -22233,6 +22602,7 @@
           <a:lstStyle/>
           <a:p>
             <a:pPr algn="ctr"/>
+            <a:endParaRPr/>
           </a:p>
         </p:txBody>
       </p:sp>
@@ -22276,6 +22646,7 @@
           <a:lstStyle/>
           <a:p>
             <a:pPr algn="ctr"/>
+            <a:endParaRPr/>
           </a:p>
         </p:txBody>
       </p:sp>
@@ -22355,6 +22726,7 @@
           <a:lstStyle/>
           <a:p>
             <a:pPr algn="ctr"/>
+            <a:endParaRPr/>
           </a:p>
         </p:txBody>
       </p:sp>
@@ -22398,6 +22770,7 @@
           <a:lstStyle/>
           <a:p>
             <a:pPr algn="ctr"/>
+            <a:endParaRPr/>
           </a:p>
         </p:txBody>
       </p:sp>
@@ -22477,6 +22850,7 @@
           <a:lstStyle/>
           <a:p>
             <a:pPr algn="ctr"/>
+            <a:endParaRPr/>
           </a:p>
         </p:txBody>
       </p:sp>
@@ -22520,6 +22894,7 @@
           <a:lstStyle/>
           <a:p>
             <a:pPr algn="ctr"/>
+            <a:endParaRPr/>
           </a:p>
         </p:txBody>
       </p:sp>
@@ -22599,6 +22974,7 @@
           <a:lstStyle/>
           <a:p>
             <a:pPr algn="ctr"/>
+            <a:endParaRPr/>
           </a:p>
         </p:txBody>
       </p:sp>
@@ -22642,6 +23018,7 @@
           <a:lstStyle/>
           <a:p>
             <a:pPr algn="ctr"/>
+            <a:endParaRPr/>
           </a:p>
         </p:txBody>
       </p:sp>
@@ -22721,6 +23098,7 @@
           <a:lstStyle/>
           <a:p>
             <a:pPr algn="ctr"/>
+            <a:endParaRPr/>
           </a:p>
         </p:txBody>
       </p:sp>
@@ -22764,6 +23142,7 @@
           <a:lstStyle/>
           <a:p>
             <a:pPr algn="ctr"/>
+            <a:endParaRPr/>
           </a:p>
         </p:txBody>
       </p:sp>
@@ -22843,6 +23222,7 @@
           <a:lstStyle/>
           <a:p>
             <a:pPr algn="ctr"/>
+            <a:endParaRPr/>
           </a:p>
         </p:txBody>
       </p:sp>
@@ -22886,6 +23266,7 @@
           <a:lstStyle/>
           <a:p>
             <a:pPr algn="ctr"/>
+            <a:endParaRPr/>
           </a:p>
         </p:txBody>
       </p:sp>
@@ -22965,6 +23346,7 @@
           <a:lstStyle/>
           <a:p>
             <a:pPr algn="ctr"/>
+            <a:endParaRPr/>
           </a:p>
         </p:txBody>
       </p:sp>
@@ -23008,6 +23390,7 @@
           <a:lstStyle/>
           <a:p>
             <a:pPr algn="ctr"/>
+            <a:endParaRPr/>
           </a:p>
         </p:txBody>
       </p:sp>
@@ -23087,6 +23470,7 @@
           <a:lstStyle/>
           <a:p>
             <a:pPr algn="ctr"/>
+            <a:endParaRPr/>
           </a:p>
         </p:txBody>
       </p:sp>
@@ -23130,6 +23514,7 @@
           <a:lstStyle/>
           <a:p>
             <a:pPr algn="ctr"/>
+            <a:endParaRPr/>
           </a:p>
         </p:txBody>
       </p:sp>
@@ -23209,6 +23594,7 @@
           <a:lstStyle/>
           <a:p>
             <a:pPr algn="ctr"/>
+            <a:endParaRPr/>
           </a:p>
         </p:txBody>
       </p:sp>
@@ -23252,6 +23638,7 @@
           <a:lstStyle/>
           <a:p>
             <a:pPr algn="ctr"/>
+            <a:endParaRPr/>
           </a:p>
         </p:txBody>
       </p:sp>
@@ -23331,6 +23718,7 @@
           <a:lstStyle/>
           <a:p>
             <a:pPr algn="ctr"/>
+            <a:endParaRPr/>
           </a:p>
         </p:txBody>
       </p:sp>
@@ -23374,6 +23762,7 @@
           <a:lstStyle/>
           <a:p>
             <a:pPr algn="ctr"/>
+            <a:endParaRPr/>
           </a:p>
         </p:txBody>
       </p:sp>
@@ -23453,6 +23842,7 @@
           <a:lstStyle/>
           <a:p>
             <a:pPr algn="ctr"/>
+            <a:endParaRPr/>
           </a:p>
         </p:txBody>
       </p:sp>
@@ -23496,6 +23886,7 @@
           <a:lstStyle/>
           <a:p>
             <a:pPr algn="ctr"/>
+            <a:endParaRPr/>
           </a:p>
         </p:txBody>
       </p:sp>
@@ -23575,6 +23966,7 @@
           <a:lstStyle/>
           <a:p>
             <a:pPr algn="ctr"/>
+            <a:endParaRPr/>
           </a:p>
         </p:txBody>
       </p:sp>
@@ -23618,6 +24010,7 @@
           <a:lstStyle/>
           <a:p>
             <a:pPr algn="ctr"/>
+            <a:endParaRPr/>
           </a:p>
         </p:txBody>
       </p:sp>
@@ -23697,6 +24090,7 @@
           <a:lstStyle/>
           <a:p>
             <a:pPr algn="ctr"/>
+            <a:endParaRPr/>
           </a:p>
         </p:txBody>
       </p:sp>
@@ -23740,6 +24134,7 @@
           <a:lstStyle/>
           <a:p>
             <a:pPr algn="ctr"/>
+            <a:endParaRPr/>
           </a:p>
         </p:txBody>
       </p:sp>
@@ -23786,7 +24181,7 @@
 </file>
 
 <file path=ppt/slides/slide20.xml><?xml version="1.0" encoding="utf-8"?>
-<p:sld xmlns:a="http://schemas.openxmlformats.org/drawingml/2006/main" xmlns:p="http://schemas.openxmlformats.org/presentationml/2006/main" xmlns:r="http://schemas.openxmlformats.org/officeDocument/2006/relationships">
+<p:sld xmlns:a="http://schemas.openxmlformats.org/drawingml/2006/main" xmlns:r="http://schemas.openxmlformats.org/officeDocument/2006/relationships" xmlns:p="http://schemas.openxmlformats.org/presentationml/2006/main">
   <p:cSld>
     <p:spTree>
       <p:nvGrpSpPr>
@@ -23794,7 +24189,14 @@
         <p:cNvGrpSpPr/>
         <p:nvPr/>
       </p:nvGrpSpPr>
-      <p:grpSpPr/>
+      <p:grpSpPr>
+        <a:xfrm>
+          <a:off x="0" y="0"/>
+          <a:ext cx="0" cy="0"/>
+          <a:chOff x="0" y="0"/>
+          <a:chExt cx="0" cy="0"/>
+        </a:xfrm>
+      </p:grpSpPr>
       <p:sp>
         <p:nvSpPr>
           <p:cNvPr id="2" name="Rectangle 1"/>
@@ -23835,6 +24237,7 @@
           <a:lstStyle/>
           <a:p>
             <a:pPr algn="ctr"/>
+            <a:endParaRPr/>
           </a:p>
         </p:txBody>
       </p:sp>
@@ -23878,6 +24281,7 @@
           <a:lstStyle/>
           <a:p>
             <a:pPr algn="ctr"/>
+            <a:endParaRPr/>
           </a:p>
         </p:txBody>
       </p:sp>
@@ -23921,6 +24325,7 @@
           <a:lstStyle/>
           <a:p>
             <a:pPr algn="ctr"/>
+            <a:endParaRPr/>
           </a:p>
         </p:txBody>
       </p:sp>
@@ -24034,6 +24439,7 @@
           <a:lstStyle/>
           <a:p>
             <a:pPr algn="ctr"/>
+            <a:endParaRPr/>
           </a:p>
         </p:txBody>
       </p:sp>
@@ -24077,6 +24483,7 @@
           <a:lstStyle/>
           <a:p>
             <a:pPr algn="ctr"/>
+            <a:endParaRPr/>
           </a:p>
         </p:txBody>
       </p:sp>
@@ -24259,6 +24666,7 @@
           <a:lstStyle/>
           <a:p>
             <a:pPr algn="ctr"/>
+            <a:endParaRPr/>
           </a:p>
         </p:txBody>
       </p:sp>
@@ -24302,6 +24710,7 @@
           <a:lstStyle/>
           <a:p>
             <a:pPr algn="ctr"/>
+            <a:endParaRPr/>
           </a:p>
         </p:txBody>
       </p:sp>
@@ -24484,6 +24893,7 @@
           <a:lstStyle/>
           <a:p>
             <a:pPr algn="ctr"/>
+            <a:endParaRPr/>
           </a:p>
         </p:txBody>
       </p:sp>
@@ -24527,6 +24937,7 @@
           <a:lstStyle/>
           <a:p>
             <a:pPr algn="ctr"/>
+            <a:endParaRPr/>
           </a:p>
         </p:txBody>
       </p:sp>
@@ -24710,6 +25121,7 @@
           <a:lstStyle/>
           <a:p>
             <a:pPr algn="ctr"/>
+            <a:endParaRPr/>
           </a:p>
         </p:txBody>
       </p:sp>
@@ -24753,6 +25165,7 @@
           <a:lstStyle/>
           <a:p>
             <a:pPr algn="ctr"/>
+            <a:endParaRPr/>
           </a:p>
         </p:txBody>
       </p:sp>
@@ -24936,6 +25349,7 @@
           <a:lstStyle/>
           <a:p>
             <a:pPr algn="ctr"/>
+            <a:endParaRPr/>
           </a:p>
         </p:txBody>
       </p:sp>
@@ -24979,6 +25393,7 @@
           <a:lstStyle/>
           <a:p>
             <a:pPr algn="ctr"/>
+            <a:endParaRPr/>
           </a:p>
         </p:txBody>
       </p:sp>
@@ -25162,6 +25577,7 @@
           <a:lstStyle/>
           <a:p>
             <a:pPr algn="ctr"/>
+            <a:endParaRPr/>
           </a:p>
         </p:txBody>
       </p:sp>
@@ -25205,6 +25621,7 @@
           <a:lstStyle/>
           <a:p>
             <a:pPr algn="ctr"/>
+            <a:endParaRPr/>
           </a:p>
         </p:txBody>
       </p:sp>
@@ -25354,6 +25771,7 @@
           <a:lstStyle/>
           <a:p>
             <a:pPr algn="ctr"/>
+            <a:endParaRPr/>
           </a:p>
         </p:txBody>
       </p:sp>
@@ -25397,6 +25815,7 @@
           <a:lstStyle/>
           <a:p>
             <a:pPr algn="ctr"/>
+            <a:endParaRPr/>
           </a:p>
         </p:txBody>
       </p:sp>
@@ -25476,6 +25895,7 @@
           <a:lstStyle/>
           <a:p>
             <a:pPr algn="ctr"/>
+            <a:endParaRPr/>
           </a:p>
         </p:txBody>
       </p:sp>
@@ -25623,6 +26043,7 @@
           <a:lstStyle/>
           <a:p>
             <a:pPr algn="ctr"/>
+            <a:endParaRPr/>
           </a:p>
         </p:txBody>
       </p:sp>
@@ -25770,6 +26191,7 @@
           <a:lstStyle/>
           <a:p>
             <a:pPr algn="ctr"/>
+            <a:endParaRPr/>
           </a:p>
         </p:txBody>
       </p:sp>
@@ -25917,6 +26339,7 @@
           <a:lstStyle/>
           <a:p>
             <a:pPr algn="ctr"/>
+            <a:endParaRPr/>
           </a:p>
         </p:txBody>
       </p:sp>
@@ -26064,6 +26487,7 @@
           <a:lstStyle/>
           <a:p>
             <a:pPr algn="ctr"/>
+            <a:endParaRPr/>
           </a:p>
         </p:txBody>
       </p:sp>
@@ -26178,7 +26602,7 @@
 </file>
 
 <file path=ppt/slides/slide21.xml><?xml version="1.0" encoding="utf-8"?>
-<p:sld xmlns:a="http://schemas.openxmlformats.org/drawingml/2006/main" xmlns:p="http://schemas.openxmlformats.org/presentationml/2006/main" xmlns:r="http://schemas.openxmlformats.org/officeDocument/2006/relationships">
+<p:sld xmlns:a="http://schemas.openxmlformats.org/drawingml/2006/main" xmlns:r="http://schemas.openxmlformats.org/officeDocument/2006/relationships" xmlns:p="http://schemas.openxmlformats.org/presentationml/2006/main">
   <p:cSld>
     <p:spTree>
       <p:nvGrpSpPr>
@@ -26186,7 +26610,14 @@
         <p:cNvGrpSpPr/>
         <p:nvPr/>
       </p:nvGrpSpPr>
-      <p:grpSpPr/>
+      <p:grpSpPr>
+        <a:xfrm>
+          <a:off x="0" y="0"/>
+          <a:ext cx="0" cy="0"/>
+          <a:chOff x="0" y="0"/>
+          <a:chExt cx="0" cy="0"/>
+        </a:xfrm>
+      </p:grpSpPr>
       <p:sp>
         <p:nvSpPr>
           <p:cNvPr id="2" name="Rectangle 1"/>
@@ -26227,6 +26658,7 @@
           <a:lstStyle/>
           <a:p>
             <a:pPr algn="ctr"/>
+            <a:endParaRPr/>
           </a:p>
         </p:txBody>
       </p:sp>
@@ -26270,6 +26702,7 @@
           <a:lstStyle/>
           <a:p>
             <a:pPr algn="ctr"/>
+            <a:endParaRPr/>
           </a:p>
         </p:txBody>
       </p:sp>
@@ -26313,6 +26746,7 @@
           <a:lstStyle/>
           <a:p>
             <a:pPr algn="ctr"/>
+            <a:endParaRPr/>
           </a:p>
         </p:txBody>
       </p:sp>
@@ -26424,6 +26858,7 @@
           <a:lstStyle/>
           <a:p>
             <a:pPr algn="ctr"/>
+            <a:endParaRPr/>
           </a:p>
         </p:txBody>
       </p:sp>
@@ -26467,6 +26902,7 @@
           <a:lstStyle/>
           <a:p>
             <a:pPr algn="ctr"/>
+            <a:endParaRPr/>
           </a:p>
         </p:txBody>
       </p:sp>
@@ -26578,6 +27014,7 @@
           <a:lstStyle/>
           <a:p>
             <a:pPr algn="ctr"/>
+            <a:endParaRPr/>
           </a:p>
         </p:txBody>
       </p:sp>
@@ -26689,6 +27126,7 @@
           <a:lstStyle/>
           <a:p>
             <a:pPr algn="ctr"/>
+            <a:endParaRPr/>
           </a:p>
         </p:txBody>
       </p:sp>
@@ -26800,6 +27238,7 @@
           <a:lstStyle/>
           <a:p>
             <a:pPr algn="ctr"/>
+            <a:endParaRPr/>
           </a:p>
         </p:txBody>
       </p:sp>
@@ -26911,6 +27350,7 @@
           <a:lstStyle/>
           <a:p>
             <a:pPr algn="ctr"/>
+            <a:endParaRPr/>
           </a:p>
         </p:txBody>
       </p:sp>
@@ -27022,6 +27462,7 @@
           <a:lstStyle/>
           <a:p>
             <a:pPr algn="ctr"/>
+            <a:endParaRPr/>
           </a:p>
         </p:txBody>
       </p:sp>
@@ -27133,6 +27574,7 @@
           <a:lstStyle/>
           <a:p>
             <a:pPr algn="ctr"/>
+            <a:endParaRPr/>
           </a:p>
         </p:txBody>
       </p:sp>
@@ -27244,6 +27686,7 @@
           <a:lstStyle/>
           <a:p>
             <a:pPr algn="ctr"/>
+            <a:endParaRPr/>
           </a:p>
         </p:txBody>
       </p:sp>
@@ -27355,6 +27798,7 @@
           <a:lstStyle/>
           <a:p>
             <a:pPr algn="ctr"/>
+            <a:endParaRPr/>
           </a:p>
         </p:txBody>
       </p:sp>
@@ -27468,6 +27912,7 @@
           <a:lstStyle/>
           <a:p>
             <a:pPr algn="ctr"/>
+            <a:endParaRPr/>
           </a:p>
         </p:txBody>
       </p:sp>
@@ -27511,6 +27956,7 @@
           <a:lstStyle/>
           <a:p>
             <a:pPr algn="ctr"/>
+            <a:endParaRPr/>
           </a:p>
         </p:txBody>
       </p:sp>
@@ -27862,6 +28308,7 @@
           <a:lstStyle/>
           <a:p>
             <a:pPr algn="ctr"/>
+            <a:endParaRPr/>
           </a:p>
         </p:txBody>
       </p:sp>
@@ -27905,6 +28352,7 @@
           <a:lstStyle/>
           <a:p>
             <a:pPr algn="ctr"/>
+            <a:endParaRPr/>
           </a:p>
         </p:txBody>
       </p:sp>
@@ -28256,6 +28704,7 @@
           <a:lstStyle/>
           <a:p>
             <a:pPr algn="ctr"/>
+            <a:endParaRPr/>
           </a:p>
         </p:txBody>
       </p:sp>
@@ -28302,7 +28751,7 @@
 </file>
 
 <file path=ppt/slides/slide22.xml><?xml version="1.0" encoding="utf-8"?>
-<p:sld xmlns:a="http://schemas.openxmlformats.org/drawingml/2006/main" xmlns:p="http://schemas.openxmlformats.org/presentationml/2006/main" xmlns:r="http://schemas.openxmlformats.org/officeDocument/2006/relationships">
+<p:sld xmlns:a="http://schemas.openxmlformats.org/drawingml/2006/main" xmlns:r="http://schemas.openxmlformats.org/officeDocument/2006/relationships" xmlns:p="http://schemas.openxmlformats.org/presentationml/2006/main">
   <p:cSld>
     <p:spTree>
       <p:nvGrpSpPr>
@@ -28310,7 +28759,14 @@
         <p:cNvGrpSpPr/>
         <p:nvPr/>
       </p:nvGrpSpPr>
-      <p:grpSpPr/>
+      <p:grpSpPr>
+        <a:xfrm>
+          <a:off x="0" y="0"/>
+          <a:ext cx="0" cy="0"/>
+          <a:chOff x="0" y="0"/>
+          <a:chExt cx="0" cy="0"/>
+        </a:xfrm>
+      </p:grpSpPr>
       <p:sp>
         <p:nvSpPr>
           <p:cNvPr id="2" name="Rectangle 1"/>
@@ -28351,6 +28807,7 @@
           <a:lstStyle/>
           <a:p>
             <a:pPr algn="ctr"/>
+            <a:endParaRPr/>
           </a:p>
         </p:txBody>
       </p:sp>
@@ -28394,6 +28851,7 @@
           <a:lstStyle/>
           <a:p>
             <a:pPr algn="ctr"/>
+            <a:endParaRPr/>
           </a:p>
         </p:txBody>
       </p:sp>
@@ -28437,6 +28895,7 @@
           <a:lstStyle/>
           <a:p>
             <a:pPr algn="ctr"/>
+            <a:endParaRPr/>
           </a:p>
         </p:txBody>
       </p:sp>
@@ -28550,6 +29009,7 @@
           <a:lstStyle/>
           <a:p>
             <a:pPr algn="ctr"/>
+            <a:endParaRPr/>
           </a:p>
         </p:txBody>
       </p:sp>
@@ -28593,6 +29053,7 @@
           <a:lstStyle/>
           <a:p>
             <a:pPr algn="ctr"/>
+            <a:endParaRPr/>
           </a:p>
         </p:txBody>
       </p:sp>
@@ -28670,6 +29131,7 @@
           <a:lstStyle/>
           <a:p>
             <a:pPr algn="ctr"/>
+            <a:endParaRPr/>
           </a:p>
         </p:txBody>
       </p:sp>
@@ -28817,6 +29279,7 @@
           <a:lstStyle/>
           <a:p>
             <a:pPr algn="ctr"/>
+            <a:endParaRPr/>
           </a:p>
         </p:txBody>
       </p:sp>
@@ -28860,6 +29323,7 @@
           <a:lstStyle/>
           <a:p>
             <a:pPr algn="ctr"/>
+            <a:endParaRPr/>
           </a:p>
         </p:txBody>
       </p:sp>
@@ -28937,6 +29401,7 @@
           <a:lstStyle/>
           <a:p>
             <a:pPr algn="ctr"/>
+            <a:endParaRPr/>
           </a:p>
         </p:txBody>
       </p:sp>
@@ -29084,6 +29549,7 @@
           <a:lstStyle/>
           <a:p>
             <a:pPr algn="ctr"/>
+            <a:endParaRPr/>
           </a:p>
         </p:txBody>
       </p:sp>
@@ -29127,6 +29593,7 @@
           <a:lstStyle/>
           <a:p>
             <a:pPr algn="ctr"/>
+            <a:endParaRPr/>
           </a:p>
         </p:txBody>
       </p:sp>
@@ -29204,6 +29671,7 @@
           <a:lstStyle/>
           <a:p>
             <a:pPr algn="ctr"/>
+            <a:endParaRPr/>
           </a:p>
         </p:txBody>
       </p:sp>
@@ -29351,6 +29819,7 @@
           <a:lstStyle/>
           <a:p>
             <a:pPr algn="ctr"/>
+            <a:endParaRPr/>
           </a:p>
         </p:txBody>
       </p:sp>
@@ -29394,6 +29863,7 @@
           <a:lstStyle/>
           <a:p>
             <a:pPr algn="ctr"/>
+            <a:endParaRPr/>
           </a:p>
         </p:txBody>
       </p:sp>
@@ -29471,6 +29941,7 @@
           <a:lstStyle/>
           <a:p>
             <a:pPr algn="ctr"/>
+            <a:endParaRPr/>
           </a:p>
         </p:txBody>
       </p:sp>
@@ -29618,6 +30089,7 @@
           <a:lstStyle/>
           <a:p>
             <a:pPr algn="ctr"/>
+            <a:endParaRPr/>
           </a:p>
         </p:txBody>
       </p:sp>
@@ -29661,6 +30133,7 @@
           <a:lstStyle/>
           <a:p>
             <a:pPr algn="ctr"/>
+            <a:endParaRPr/>
           </a:p>
         </p:txBody>
       </p:sp>
@@ -29738,6 +30211,7 @@
           <a:lstStyle/>
           <a:p>
             <a:pPr algn="ctr"/>
+            <a:endParaRPr/>
           </a:p>
         </p:txBody>
       </p:sp>
@@ -29885,6 +30359,7 @@
           <a:lstStyle/>
           <a:p>
             <a:pPr algn="ctr"/>
+            <a:endParaRPr/>
           </a:p>
         </p:txBody>
       </p:sp>
@@ -29928,6 +30403,7 @@
           <a:lstStyle/>
           <a:p>
             <a:pPr algn="ctr"/>
+            <a:endParaRPr/>
           </a:p>
         </p:txBody>
       </p:sp>
@@ -30005,6 +30481,7 @@
           <a:lstStyle/>
           <a:p>
             <a:pPr algn="ctr"/>
+            <a:endParaRPr/>
           </a:p>
         </p:txBody>
       </p:sp>
@@ -30152,6 +30629,7 @@
           <a:lstStyle/>
           <a:p>
             <a:pPr algn="ctr"/>
+            <a:endParaRPr/>
           </a:p>
         </p:txBody>
       </p:sp>
@@ -30195,6 +30673,7 @@
           <a:lstStyle/>
           <a:p>
             <a:pPr algn="ctr"/>
+            <a:endParaRPr/>
           </a:p>
         </p:txBody>
       </p:sp>
@@ -30272,6 +30751,7 @@
           <a:lstStyle/>
           <a:p>
             <a:pPr algn="ctr"/>
+            <a:endParaRPr/>
           </a:p>
         </p:txBody>
       </p:sp>
@@ -30419,6 +30899,7 @@
           <a:lstStyle/>
           <a:p>
             <a:pPr algn="ctr"/>
+            <a:endParaRPr/>
           </a:p>
         </p:txBody>
       </p:sp>
@@ -30462,6 +30943,7 @@
           <a:lstStyle/>
           <a:p>
             <a:pPr algn="ctr"/>
+            <a:endParaRPr/>
           </a:p>
         </p:txBody>
       </p:sp>
@@ -30539,6 +31021,7 @@
           <a:lstStyle/>
           <a:p>
             <a:pPr algn="ctr"/>
+            <a:endParaRPr/>
           </a:p>
         </p:txBody>
       </p:sp>
@@ -30653,7 +31136,7 @@
 </file>
 
 <file path=ppt/slides/slide23.xml><?xml version="1.0" encoding="utf-8"?>
-<p:sld xmlns:a="http://schemas.openxmlformats.org/drawingml/2006/main" xmlns:p="http://schemas.openxmlformats.org/presentationml/2006/main" xmlns:r="http://schemas.openxmlformats.org/officeDocument/2006/relationships">
+<p:sld xmlns:a="http://schemas.openxmlformats.org/drawingml/2006/main" xmlns:r="http://schemas.openxmlformats.org/officeDocument/2006/relationships" xmlns:p="http://schemas.openxmlformats.org/presentationml/2006/main">
   <p:cSld>
     <p:spTree>
       <p:nvGrpSpPr>
@@ -30661,7 +31144,14 @@
         <p:cNvGrpSpPr/>
         <p:nvPr/>
       </p:nvGrpSpPr>
-      <p:grpSpPr/>
+      <p:grpSpPr>
+        <a:xfrm>
+          <a:off x="0" y="0"/>
+          <a:ext cx="0" cy="0"/>
+          <a:chOff x="0" y="0"/>
+          <a:chExt cx="0" cy="0"/>
+        </a:xfrm>
+      </p:grpSpPr>
       <p:sp>
         <p:nvSpPr>
           <p:cNvPr id="2" name="Rectangle 1"/>
@@ -30702,6 +31192,7 @@
           <a:lstStyle/>
           <a:p>
             <a:pPr algn="ctr"/>
+            <a:endParaRPr/>
           </a:p>
         </p:txBody>
       </p:sp>
@@ -30745,6 +31236,7 @@
           <a:lstStyle/>
           <a:p>
             <a:pPr algn="ctr"/>
+            <a:endParaRPr/>
           </a:p>
         </p:txBody>
       </p:sp>
@@ -30788,6 +31280,7 @@
           <a:lstStyle/>
           <a:p>
             <a:pPr algn="ctr"/>
+            <a:endParaRPr/>
           </a:p>
         </p:txBody>
       </p:sp>
@@ -30923,6 +31416,7 @@
           <a:lstStyle/>
           <a:p>
             <a:pPr algn="ctr"/>
+            <a:endParaRPr/>
           </a:p>
         </p:txBody>
       </p:sp>
@@ -31024,6 +31518,7 @@
           <a:lstStyle/>
           <a:p>
             <a:pPr algn="ctr"/>
+            <a:endParaRPr/>
           </a:p>
         </p:txBody>
       </p:sp>
@@ -31125,6 +31620,7 @@
           <a:lstStyle/>
           <a:p>
             <a:pPr algn="ctr"/>
+            <a:endParaRPr/>
           </a:p>
         </p:txBody>
       </p:sp>
@@ -31226,6 +31722,7 @@
           <a:lstStyle/>
           <a:p>
             <a:pPr algn="ctr"/>
+            <a:endParaRPr/>
           </a:p>
         </p:txBody>
       </p:sp>
@@ -31272,7 +31769,7 @@
 </file>
 
 <file path=ppt/slides/slide24.xml><?xml version="1.0" encoding="utf-8"?>
-<p:sld xmlns:a="http://schemas.openxmlformats.org/drawingml/2006/main" xmlns:p="http://schemas.openxmlformats.org/presentationml/2006/main" xmlns:r="http://schemas.openxmlformats.org/officeDocument/2006/relationships">
+<p:sld xmlns:a="http://schemas.openxmlformats.org/drawingml/2006/main" xmlns:r="http://schemas.openxmlformats.org/officeDocument/2006/relationships" xmlns:p="http://schemas.openxmlformats.org/presentationml/2006/main">
   <p:cSld>
     <p:spTree>
       <p:nvGrpSpPr>
@@ -31280,7 +31777,14 @@
         <p:cNvGrpSpPr/>
         <p:nvPr/>
       </p:nvGrpSpPr>
-      <p:grpSpPr/>
+      <p:grpSpPr>
+        <a:xfrm>
+          <a:off x="0" y="0"/>
+          <a:ext cx="0" cy="0"/>
+          <a:chOff x="0" y="0"/>
+          <a:chExt cx="0" cy="0"/>
+        </a:xfrm>
+      </p:grpSpPr>
       <p:sp>
         <p:nvSpPr>
           <p:cNvPr id="2" name="Rectangle 1"/>
@@ -31321,6 +31825,7 @@
           <a:lstStyle/>
           <a:p>
             <a:pPr algn="ctr"/>
+            <a:endParaRPr/>
           </a:p>
         </p:txBody>
       </p:sp>
@@ -31364,6 +31869,7 @@
           <a:lstStyle/>
           <a:p>
             <a:pPr algn="ctr"/>
+            <a:endParaRPr/>
           </a:p>
         </p:txBody>
       </p:sp>
@@ -31407,6 +31913,7 @@
           <a:lstStyle/>
           <a:p>
             <a:pPr algn="ctr"/>
+            <a:endParaRPr/>
           </a:p>
         </p:txBody>
       </p:sp>
@@ -31542,6 +32049,7 @@
           <a:lstStyle/>
           <a:p>
             <a:pPr algn="ctr"/>
+            <a:endParaRPr/>
           </a:p>
         </p:txBody>
       </p:sp>
@@ -31643,6 +32151,7 @@
           <a:lstStyle/>
           <a:p>
             <a:pPr algn="ctr"/>
+            <a:endParaRPr/>
           </a:p>
         </p:txBody>
       </p:sp>
@@ -31744,6 +32253,7 @@
           <a:lstStyle/>
           <a:p>
             <a:pPr algn="ctr"/>
+            <a:endParaRPr/>
           </a:p>
         </p:txBody>
       </p:sp>
@@ -31845,6 +32355,7 @@
           <a:lstStyle/>
           <a:p>
             <a:pPr algn="ctr"/>
+            <a:endParaRPr/>
           </a:p>
         </p:txBody>
       </p:sp>
@@ -31891,7 +32402,7 @@
 </file>
 
 <file path=ppt/slides/slide25.xml><?xml version="1.0" encoding="utf-8"?>
-<p:sld xmlns:a="http://schemas.openxmlformats.org/drawingml/2006/main" xmlns:p="http://schemas.openxmlformats.org/presentationml/2006/main" xmlns:r="http://schemas.openxmlformats.org/officeDocument/2006/relationships">
+<p:sld xmlns:a="http://schemas.openxmlformats.org/drawingml/2006/main" xmlns:r="http://schemas.openxmlformats.org/officeDocument/2006/relationships" xmlns:p="http://schemas.openxmlformats.org/presentationml/2006/main">
   <p:cSld>
     <p:spTree>
       <p:nvGrpSpPr>
@@ -31899,7 +32410,14 @@
         <p:cNvGrpSpPr/>
         <p:nvPr/>
       </p:nvGrpSpPr>
-      <p:grpSpPr/>
+      <p:grpSpPr>
+        <a:xfrm>
+          <a:off x="0" y="0"/>
+          <a:ext cx="0" cy="0"/>
+          <a:chOff x="0" y="0"/>
+          <a:chExt cx="0" cy="0"/>
+        </a:xfrm>
+      </p:grpSpPr>
       <p:sp>
         <p:nvSpPr>
           <p:cNvPr id="2" name="Rectangle 1"/>
@@ -31940,6 +32458,7 @@
           <a:lstStyle/>
           <a:p>
             <a:pPr algn="ctr"/>
+            <a:endParaRPr/>
           </a:p>
         </p:txBody>
       </p:sp>
@@ -31983,6 +32502,7 @@
           <a:lstStyle/>
           <a:p>
             <a:pPr algn="ctr"/>
+            <a:endParaRPr/>
           </a:p>
         </p:txBody>
       </p:sp>
@@ -32026,6 +32546,7 @@
           <a:lstStyle/>
           <a:p>
             <a:pPr algn="ctr"/>
+            <a:endParaRPr/>
           </a:p>
         </p:txBody>
       </p:sp>
@@ -32161,6 +32682,7 @@
           <a:lstStyle/>
           <a:p>
             <a:pPr algn="ctr"/>
+            <a:endParaRPr/>
           </a:p>
         </p:txBody>
       </p:sp>
@@ -32262,6 +32784,7 @@
           <a:lstStyle/>
           <a:p>
             <a:pPr algn="ctr"/>
+            <a:endParaRPr/>
           </a:p>
         </p:txBody>
       </p:sp>
@@ -32308,7 +32831,7 @@
 </file>
 
 <file path=ppt/slides/slide3.xml><?xml version="1.0" encoding="utf-8"?>
-<p:sld xmlns:a="http://schemas.openxmlformats.org/drawingml/2006/main" xmlns:p="http://schemas.openxmlformats.org/presentationml/2006/main" xmlns:r="http://schemas.openxmlformats.org/officeDocument/2006/relationships">
+<p:sld xmlns:a="http://schemas.openxmlformats.org/drawingml/2006/main" xmlns:r="http://schemas.openxmlformats.org/officeDocument/2006/relationships" xmlns:p="http://schemas.openxmlformats.org/presentationml/2006/main">
   <p:cSld>
     <p:spTree>
       <p:nvGrpSpPr>
@@ -32316,7 +32839,14 @@
         <p:cNvGrpSpPr/>
         <p:nvPr/>
       </p:nvGrpSpPr>
-      <p:grpSpPr/>
+      <p:grpSpPr>
+        <a:xfrm>
+          <a:off x="0" y="0"/>
+          <a:ext cx="0" cy="0"/>
+          <a:chOff x="0" y="0"/>
+          <a:chExt cx="0" cy="0"/>
+        </a:xfrm>
+      </p:grpSpPr>
       <p:sp>
         <p:nvSpPr>
           <p:cNvPr id="2" name="Rectangle 1"/>
@@ -32357,6 +32887,7 @@
           <a:lstStyle/>
           <a:p>
             <a:pPr algn="ctr"/>
+            <a:endParaRPr/>
           </a:p>
         </p:txBody>
       </p:sp>
@@ -32400,6 +32931,7 @@
           <a:lstStyle/>
           <a:p>
             <a:pPr algn="ctr"/>
+            <a:endParaRPr/>
           </a:p>
         </p:txBody>
       </p:sp>
@@ -32443,6 +32975,7 @@
           <a:lstStyle/>
           <a:p>
             <a:pPr algn="ctr"/>
+            <a:endParaRPr/>
           </a:p>
         </p:txBody>
       </p:sp>
@@ -32556,6 +33089,7 @@
           <a:lstStyle/>
           <a:p>
             <a:pPr algn="ctr"/>
+            <a:endParaRPr/>
           </a:p>
         </p:txBody>
       </p:sp>
@@ -32599,6 +33133,7 @@
           <a:lstStyle/>
           <a:p>
             <a:pPr algn="ctr"/>
+            <a:endParaRPr/>
           </a:p>
         </p:txBody>
       </p:sp>
@@ -32746,6 +33281,7 @@
           <a:lstStyle/>
           <a:p>
             <a:pPr algn="ctr"/>
+            <a:endParaRPr/>
           </a:p>
         </p:txBody>
       </p:sp>
@@ -32789,6 +33325,7 @@
           <a:lstStyle/>
           <a:p>
             <a:pPr algn="ctr"/>
+            <a:endParaRPr/>
           </a:p>
         </p:txBody>
       </p:sp>
@@ -32936,6 +33473,7 @@
           <a:lstStyle/>
           <a:p>
             <a:pPr algn="ctr"/>
+            <a:endParaRPr/>
           </a:p>
         </p:txBody>
       </p:sp>
@@ -32979,6 +33517,7 @@
           <a:lstStyle/>
           <a:p>
             <a:pPr algn="ctr"/>
+            <a:endParaRPr/>
           </a:p>
         </p:txBody>
       </p:sp>
@@ -33126,6 +33665,7 @@
           <a:lstStyle/>
           <a:p>
             <a:pPr algn="ctr"/>
+            <a:endParaRPr/>
           </a:p>
         </p:txBody>
       </p:sp>
@@ -33169,6 +33709,7 @@
           <a:lstStyle/>
           <a:p>
             <a:pPr algn="ctr"/>
+            <a:endParaRPr/>
           </a:p>
         </p:txBody>
       </p:sp>
@@ -33283,7 +33824,7 @@
 </file>
 
 <file path=ppt/slides/slide4.xml><?xml version="1.0" encoding="utf-8"?>
-<p:sld xmlns:a="http://schemas.openxmlformats.org/drawingml/2006/main" xmlns:p="http://schemas.openxmlformats.org/presentationml/2006/main" xmlns:r="http://schemas.openxmlformats.org/officeDocument/2006/relationships">
+<p:sld xmlns:a="http://schemas.openxmlformats.org/drawingml/2006/main" xmlns:r="http://schemas.openxmlformats.org/officeDocument/2006/relationships" xmlns:p="http://schemas.openxmlformats.org/presentationml/2006/main">
   <p:cSld>
     <p:spTree>
       <p:nvGrpSpPr>
@@ -33291,7 +33832,14 @@
         <p:cNvGrpSpPr/>
         <p:nvPr/>
       </p:nvGrpSpPr>
-      <p:grpSpPr/>
+      <p:grpSpPr>
+        <a:xfrm>
+          <a:off x="0" y="0"/>
+          <a:ext cx="0" cy="0"/>
+          <a:chOff x="0" y="0"/>
+          <a:chExt cx="0" cy="0"/>
+        </a:xfrm>
+      </p:grpSpPr>
       <p:sp>
         <p:nvSpPr>
           <p:cNvPr id="2" name="Rectangle 1"/>
@@ -33332,6 +33880,7 @@
           <a:lstStyle/>
           <a:p>
             <a:pPr algn="ctr"/>
+            <a:endParaRPr/>
           </a:p>
         </p:txBody>
       </p:sp>
@@ -33375,6 +33924,7 @@
           <a:lstStyle/>
           <a:p>
             <a:pPr algn="ctr"/>
+            <a:endParaRPr/>
           </a:p>
         </p:txBody>
       </p:sp>
@@ -33418,6 +33968,7 @@
           <a:lstStyle/>
           <a:p>
             <a:pPr algn="ctr"/>
+            <a:endParaRPr/>
           </a:p>
         </p:txBody>
       </p:sp>
@@ -33531,6 +34082,7 @@
           <a:lstStyle/>
           <a:p>
             <a:pPr algn="ctr"/>
+            <a:endParaRPr/>
           </a:p>
         </p:txBody>
       </p:sp>
@@ -33574,6 +34126,7 @@
           <a:lstStyle/>
           <a:p>
             <a:pPr algn="ctr"/>
+            <a:endParaRPr/>
           </a:p>
         </p:txBody>
       </p:sp>
@@ -33721,6 +34274,7 @@
           <a:lstStyle/>
           <a:p>
             <a:pPr algn="ctr"/>
+            <a:endParaRPr/>
           </a:p>
         </p:txBody>
       </p:sp>
@@ -33764,6 +34318,7 @@
           <a:lstStyle/>
           <a:p>
             <a:pPr algn="ctr"/>
+            <a:endParaRPr/>
           </a:p>
         </p:txBody>
       </p:sp>
@@ -33911,6 +34466,7 @@
           <a:lstStyle/>
           <a:p>
             <a:pPr algn="ctr"/>
+            <a:endParaRPr/>
           </a:p>
         </p:txBody>
       </p:sp>
@@ -33954,6 +34510,7 @@
           <a:lstStyle/>
           <a:p>
             <a:pPr algn="ctr"/>
+            <a:endParaRPr/>
           </a:p>
         </p:txBody>
       </p:sp>
@@ -34101,6 +34658,7 @@
           <a:lstStyle/>
           <a:p>
             <a:pPr algn="ctr"/>
+            <a:endParaRPr/>
           </a:p>
         </p:txBody>
       </p:sp>
@@ -34144,6 +34702,7 @@
           <a:lstStyle/>
           <a:p>
             <a:pPr algn="ctr"/>
+            <a:endParaRPr/>
           </a:p>
         </p:txBody>
       </p:sp>
@@ -34291,6 +34850,7 @@
           <a:lstStyle/>
           <a:p>
             <a:pPr algn="ctr"/>
+            <a:endParaRPr/>
           </a:p>
         </p:txBody>
       </p:sp>
@@ -34334,6 +34894,7 @@
           <a:lstStyle/>
           <a:p>
             <a:pPr algn="ctr"/>
+            <a:endParaRPr/>
           </a:p>
         </p:txBody>
       </p:sp>
@@ -34481,6 +35042,7 @@
           <a:lstStyle/>
           <a:p>
             <a:pPr algn="ctr"/>
+            <a:endParaRPr/>
           </a:p>
         </p:txBody>
       </p:sp>
@@ -34524,6 +35086,7 @@
           <a:lstStyle/>
           <a:p>
             <a:pPr algn="ctr"/>
+            <a:endParaRPr/>
           </a:p>
         </p:txBody>
       </p:sp>
@@ -34638,7 +35201,7 @@
 </file>
 
 <file path=ppt/slides/slide5.xml><?xml version="1.0" encoding="utf-8"?>
-<p:sld xmlns:a="http://schemas.openxmlformats.org/drawingml/2006/main" xmlns:p="http://schemas.openxmlformats.org/presentationml/2006/main" xmlns:r="http://schemas.openxmlformats.org/officeDocument/2006/relationships">
+<p:sld xmlns:a="http://schemas.openxmlformats.org/drawingml/2006/main" xmlns:r="http://schemas.openxmlformats.org/officeDocument/2006/relationships" xmlns:p="http://schemas.openxmlformats.org/presentationml/2006/main">
   <p:cSld>
     <p:spTree>
       <p:nvGrpSpPr>
@@ -34646,7 +35209,14 @@
         <p:cNvGrpSpPr/>
         <p:nvPr/>
       </p:nvGrpSpPr>
-      <p:grpSpPr/>
+      <p:grpSpPr>
+        <a:xfrm>
+          <a:off x="0" y="0"/>
+          <a:ext cx="0" cy="0"/>
+          <a:chOff x="0" y="0"/>
+          <a:chExt cx="0" cy="0"/>
+        </a:xfrm>
+      </p:grpSpPr>
       <p:sp>
         <p:nvSpPr>
           <p:cNvPr id="2" name="Rectangle 1"/>
@@ -34687,6 +35257,7 @@
           <a:lstStyle/>
           <a:p>
             <a:pPr algn="ctr"/>
+            <a:endParaRPr/>
           </a:p>
         </p:txBody>
       </p:sp>
@@ -34730,6 +35301,7 @@
           <a:lstStyle/>
           <a:p>
             <a:pPr algn="ctr"/>
+            <a:endParaRPr/>
           </a:p>
         </p:txBody>
       </p:sp>
@@ -34773,6 +35345,7 @@
           <a:lstStyle/>
           <a:p>
             <a:pPr algn="ctr"/>
+            <a:endParaRPr/>
           </a:p>
         </p:txBody>
       </p:sp>
@@ -34954,6 +35527,7 @@
           <a:lstStyle/>
           <a:p>
             <a:pPr algn="ctr"/>
+            <a:endParaRPr/>
           </a:p>
         </p:txBody>
       </p:sp>
@@ -35031,6 +35605,7 @@
           <a:lstStyle/>
           <a:p>
             <a:pPr algn="ctr"/>
+            <a:endParaRPr/>
           </a:p>
         </p:txBody>
       </p:sp>
@@ -35178,6 +35753,7 @@
           <a:lstStyle/>
           <a:p>
             <a:pPr algn="ctr"/>
+            <a:endParaRPr/>
           </a:p>
         </p:txBody>
       </p:sp>
@@ -35255,6 +35831,7 @@
           <a:lstStyle/>
           <a:p>
             <a:pPr algn="ctr"/>
+            <a:endParaRPr/>
           </a:p>
         </p:txBody>
       </p:sp>
@@ -35402,6 +35979,7 @@
           <a:lstStyle/>
           <a:p>
             <a:pPr algn="ctr"/>
+            <a:endParaRPr/>
           </a:p>
         </p:txBody>
       </p:sp>
@@ -35479,6 +36057,7 @@
           <a:lstStyle/>
           <a:p>
             <a:pPr algn="ctr"/>
+            <a:endParaRPr/>
           </a:p>
         </p:txBody>
       </p:sp>
@@ -35626,6 +36205,7 @@
           <a:lstStyle/>
           <a:p>
             <a:pPr algn="ctr"/>
+            <a:endParaRPr/>
           </a:p>
         </p:txBody>
       </p:sp>
@@ -35703,6 +36283,7 @@
           <a:lstStyle/>
           <a:p>
             <a:pPr algn="ctr"/>
+            <a:endParaRPr/>
           </a:p>
         </p:txBody>
       </p:sp>
@@ -35850,6 +36431,7 @@
           <a:lstStyle/>
           <a:p>
             <a:pPr algn="ctr"/>
+            <a:endParaRPr/>
           </a:p>
         </p:txBody>
       </p:sp>
@@ -35927,6 +36509,7 @@
           <a:lstStyle/>
           <a:p>
             <a:pPr algn="ctr"/>
+            <a:endParaRPr/>
           </a:p>
         </p:txBody>
       </p:sp>
@@ -36074,6 +36657,7 @@
           <a:lstStyle/>
           <a:p>
             <a:pPr algn="ctr"/>
+            <a:endParaRPr/>
           </a:p>
         </p:txBody>
       </p:sp>
@@ -36151,6 +36735,7 @@
           <a:lstStyle/>
           <a:p>
             <a:pPr algn="ctr"/>
+            <a:endParaRPr/>
           </a:p>
         </p:txBody>
       </p:sp>
@@ -36298,6 +36883,7 @@
           <a:lstStyle/>
           <a:p>
             <a:pPr algn="ctr"/>
+            <a:endParaRPr/>
           </a:p>
         </p:txBody>
       </p:sp>
@@ -36375,6 +36961,7 @@
           <a:lstStyle/>
           <a:p>
             <a:pPr algn="ctr"/>
+            <a:endParaRPr/>
           </a:p>
         </p:txBody>
       </p:sp>
@@ -36522,6 +37109,7 @@
           <a:lstStyle/>
           <a:p>
             <a:pPr algn="ctr"/>
+            <a:endParaRPr/>
           </a:p>
         </p:txBody>
       </p:sp>
@@ -36599,6 +37187,7 @@
           <a:lstStyle/>
           <a:p>
             <a:pPr algn="ctr"/>
+            <a:endParaRPr/>
           </a:p>
         </p:txBody>
       </p:sp>
@@ -36746,6 +37335,7 @@
           <a:lstStyle/>
           <a:p>
             <a:pPr algn="ctr"/>
+            <a:endParaRPr/>
           </a:p>
         </p:txBody>
       </p:sp>
@@ -36792,7 +37382,7 @@
 </file>
 
 <file path=ppt/slides/slide6.xml><?xml version="1.0" encoding="utf-8"?>
-<p:sld xmlns:a="http://schemas.openxmlformats.org/drawingml/2006/main" xmlns:p="http://schemas.openxmlformats.org/presentationml/2006/main" xmlns:r="http://schemas.openxmlformats.org/officeDocument/2006/relationships">
+<p:sld xmlns:a="http://schemas.openxmlformats.org/drawingml/2006/main" xmlns:r="http://schemas.openxmlformats.org/officeDocument/2006/relationships" xmlns:p="http://schemas.openxmlformats.org/presentationml/2006/main">
   <p:cSld>
     <p:spTree>
       <p:nvGrpSpPr>
@@ -36800,7 +37390,14 @@
         <p:cNvGrpSpPr/>
         <p:nvPr/>
       </p:nvGrpSpPr>
-      <p:grpSpPr/>
+      <p:grpSpPr>
+        <a:xfrm>
+          <a:off x="0" y="0"/>
+          <a:ext cx="0" cy="0"/>
+          <a:chOff x="0" y="0"/>
+          <a:chExt cx="0" cy="0"/>
+        </a:xfrm>
+      </p:grpSpPr>
       <p:sp>
         <p:nvSpPr>
           <p:cNvPr id="2" name="Rectangle 1"/>
@@ -36841,6 +37438,7 @@
           <a:lstStyle/>
           <a:p>
             <a:pPr algn="ctr"/>
+            <a:endParaRPr/>
           </a:p>
         </p:txBody>
       </p:sp>
@@ -36884,6 +37482,7 @@
           <a:lstStyle/>
           <a:p>
             <a:pPr algn="ctr"/>
+            <a:endParaRPr/>
           </a:p>
         </p:txBody>
       </p:sp>
@@ -36927,6 +37526,7 @@
           <a:lstStyle/>
           <a:p>
             <a:pPr algn="ctr"/>
+            <a:endParaRPr/>
           </a:p>
         </p:txBody>
       </p:sp>
@@ -37031,7 +37631,7 @@
 </file>
 
 <file path=ppt/slides/slide7.xml><?xml version="1.0" encoding="utf-8"?>
-<p:sld xmlns:a="http://schemas.openxmlformats.org/drawingml/2006/main" xmlns:p="http://schemas.openxmlformats.org/presentationml/2006/main" xmlns:r="http://schemas.openxmlformats.org/officeDocument/2006/relationships">
+<p:sld xmlns:a="http://schemas.openxmlformats.org/drawingml/2006/main" xmlns:r="http://schemas.openxmlformats.org/officeDocument/2006/relationships" xmlns:p="http://schemas.openxmlformats.org/presentationml/2006/main">
   <p:cSld>
     <p:spTree>
       <p:nvGrpSpPr>
@@ -37039,7 +37639,14 @@
         <p:cNvGrpSpPr/>
         <p:nvPr/>
       </p:nvGrpSpPr>
-      <p:grpSpPr/>
+      <p:grpSpPr>
+        <a:xfrm>
+          <a:off x="0" y="0"/>
+          <a:ext cx="0" cy="0"/>
+          <a:chOff x="0" y="0"/>
+          <a:chExt cx="0" cy="0"/>
+        </a:xfrm>
+      </p:grpSpPr>
       <p:sp>
         <p:nvSpPr>
           <p:cNvPr id="2" name="Rectangle 1"/>
@@ -37080,6 +37687,7 @@
           <a:lstStyle/>
           <a:p>
             <a:pPr algn="ctr"/>
+            <a:endParaRPr/>
           </a:p>
         </p:txBody>
       </p:sp>
@@ -37123,6 +37731,7 @@
           <a:lstStyle/>
           <a:p>
             <a:pPr algn="ctr"/>
+            <a:endParaRPr/>
           </a:p>
         </p:txBody>
       </p:sp>
@@ -37166,6 +37775,7 @@
           <a:lstStyle/>
           <a:p>
             <a:pPr algn="ctr"/>
+            <a:endParaRPr/>
           </a:p>
         </p:txBody>
       </p:sp>
@@ -37279,6 +37889,7 @@
           <a:lstStyle/>
           <a:p>
             <a:pPr algn="ctr"/>
+            <a:endParaRPr/>
           </a:p>
         </p:txBody>
       </p:sp>
@@ -37322,6 +37933,7 @@
           <a:lstStyle/>
           <a:p>
             <a:pPr algn="ctr"/>
+            <a:endParaRPr/>
           </a:p>
         </p:txBody>
       </p:sp>
@@ -37605,6 +38217,7 @@
           <a:lstStyle/>
           <a:p>
             <a:pPr algn="ctr"/>
+            <a:endParaRPr/>
           </a:p>
         </p:txBody>
       </p:sp>
@@ -37684,6 +38297,7 @@
           <a:lstStyle/>
           <a:p>
             <a:pPr algn="ctr"/>
+            <a:endParaRPr/>
           </a:p>
         </p:txBody>
       </p:sp>
@@ -37727,6 +38341,7 @@
           <a:lstStyle/>
           <a:p>
             <a:pPr algn="ctr"/>
+            <a:endParaRPr/>
           </a:p>
         </p:txBody>
       </p:sp>
@@ -38010,6 +38625,7 @@
           <a:lstStyle/>
           <a:p>
             <a:pPr algn="ctr"/>
+            <a:endParaRPr/>
           </a:p>
         </p:txBody>
       </p:sp>
@@ -38090,7 +38706,7 @@
 </file>
 
 <file path=ppt/slides/slide8.xml><?xml version="1.0" encoding="utf-8"?>
-<p:sld xmlns:a="http://schemas.openxmlformats.org/drawingml/2006/main" xmlns:p="http://schemas.openxmlformats.org/presentationml/2006/main" xmlns:r="http://schemas.openxmlformats.org/officeDocument/2006/relationships">
+<p:sld xmlns:a="http://schemas.openxmlformats.org/drawingml/2006/main" xmlns:r="http://schemas.openxmlformats.org/officeDocument/2006/relationships" xmlns:p="http://schemas.openxmlformats.org/presentationml/2006/main">
   <p:cSld>
     <p:spTree>
       <p:nvGrpSpPr>
@@ -38098,7 +38714,14 @@
         <p:cNvGrpSpPr/>
         <p:nvPr/>
       </p:nvGrpSpPr>
-      <p:grpSpPr/>
+      <p:grpSpPr>
+        <a:xfrm>
+          <a:off x="0" y="0"/>
+          <a:ext cx="0" cy="0"/>
+          <a:chOff x="0" y="0"/>
+          <a:chExt cx="0" cy="0"/>
+        </a:xfrm>
+      </p:grpSpPr>
       <p:sp>
         <p:nvSpPr>
           <p:cNvPr id="2" name="Rectangle 1"/>
@@ -38139,6 +38762,7 @@
           <a:lstStyle/>
           <a:p>
             <a:pPr algn="ctr"/>
+            <a:endParaRPr/>
           </a:p>
         </p:txBody>
       </p:sp>
@@ -38182,6 +38806,7 @@
           <a:lstStyle/>
           <a:p>
             <a:pPr algn="ctr"/>
+            <a:endParaRPr/>
           </a:p>
         </p:txBody>
       </p:sp>
@@ -38225,6 +38850,7 @@
           <a:lstStyle/>
           <a:p>
             <a:pPr algn="ctr"/>
+            <a:endParaRPr/>
           </a:p>
         </p:txBody>
       </p:sp>
@@ -38338,6 +38964,7 @@
           <a:lstStyle/>
           <a:p>
             <a:pPr algn="ctr"/>
+            <a:endParaRPr/>
           </a:p>
         </p:txBody>
       </p:sp>
@@ -38381,6 +39008,7 @@
           <a:lstStyle/>
           <a:p>
             <a:pPr algn="ctr"/>
+            <a:endParaRPr/>
           </a:p>
         </p:txBody>
       </p:sp>
@@ -38492,6 +39120,7 @@
           <a:lstStyle/>
           <a:p>
             <a:pPr algn="ctr"/>
+            <a:endParaRPr/>
           </a:p>
         </p:txBody>
       </p:sp>
@@ -38775,6 +39404,7 @@
           <a:lstStyle/>
           <a:p>
             <a:pPr algn="ctr"/>
+            <a:endParaRPr/>
           </a:p>
         </p:txBody>
       </p:sp>
@@ -38818,6 +39448,7 @@
           <a:lstStyle/>
           <a:p>
             <a:pPr algn="ctr"/>
+            <a:endParaRPr/>
           </a:p>
         </p:txBody>
       </p:sp>
@@ -38929,6 +39560,7 @@
           <a:lstStyle/>
           <a:p>
             <a:pPr algn="ctr"/>
+            <a:endParaRPr/>
           </a:p>
         </p:txBody>
       </p:sp>
@@ -39246,6 +39878,7 @@
           <a:lstStyle/>
           <a:p>
             <a:pPr algn="ctr"/>
+            <a:endParaRPr/>
           </a:p>
         </p:txBody>
       </p:sp>
@@ -39289,6 +39922,7 @@
           <a:lstStyle/>
           <a:p>
             <a:pPr algn="ctr"/>
+            <a:endParaRPr/>
           </a:p>
         </p:txBody>
       </p:sp>
@@ -39400,6 +40034,7 @@
           <a:lstStyle/>
           <a:p>
             <a:pPr algn="ctr"/>
+            <a:endParaRPr/>
           </a:p>
         </p:txBody>
       </p:sp>
@@ -39650,7 +40285,7 @@
 </file>
 
 <file path=ppt/slides/slide9.xml><?xml version="1.0" encoding="utf-8"?>
-<p:sld xmlns:a="http://schemas.openxmlformats.org/drawingml/2006/main" xmlns:p="http://schemas.openxmlformats.org/presentationml/2006/main" xmlns:r="http://schemas.openxmlformats.org/officeDocument/2006/relationships">
+<p:sld xmlns:a="http://schemas.openxmlformats.org/drawingml/2006/main" xmlns:r="http://schemas.openxmlformats.org/officeDocument/2006/relationships" xmlns:p="http://schemas.openxmlformats.org/presentationml/2006/main">
   <p:cSld>
     <p:spTree>
       <p:nvGrpSpPr>
@@ -39658,7 +40293,14 @@
         <p:cNvGrpSpPr/>
         <p:nvPr/>
       </p:nvGrpSpPr>
-      <p:grpSpPr/>
+      <p:grpSpPr>
+        <a:xfrm>
+          <a:off x="0" y="0"/>
+          <a:ext cx="0" cy="0"/>
+          <a:chOff x="0" y="0"/>
+          <a:chExt cx="0" cy="0"/>
+        </a:xfrm>
+      </p:grpSpPr>
       <p:sp>
         <p:nvSpPr>
           <p:cNvPr id="2" name="Rectangle 1"/>
@@ -39699,6 +40341,7 @@
           <a:lstStyle/>
           <a:p>
             <a:pPr algn="ctr"/>
+            <a:endParaRPr/>
           </a:p>
         </p:txBody>
       </p:sp>
@@ -39742,6 +40385,7 @@
           <a:lstStyle/>
           <a:p>
             <a:pPr algn="ctr"/>
+            <a:endParaRPr/>
           </a:p>
         </p:txBody>
       </p:sp>
@@ -39785,6 +40429,7 @@
           <a:lstStyle/>
           <a:p>
             <a:pPr algn="ctr"/>
+            <a:endParaRPr/>
           </a:p>
         </p:txBody>
       </p:sp>
@@ -39898,6 +40543,7 @@
           <a:lstStyle/>
           <a:p>
             <a:pPr algn="ctr"/>
+            <a:endParaRPr/>
           </a:p>
         </p:txBody>
       </p:sp>
@@ -39941,6 +40587,7 @@
           <a:lstStyle/>
           <a:p>
             <a:pPr algn="ctr"/>
+            <a:endParaRPr/>
           </a:p>
         </p:txBody>
       </p:sp>
@@ -40258,6 +40905,7 @@
           <a:lstStyle/>
           <a:p>
             <a:pPr algn="ctr"/>
+            <a:endParaRPr/>
           </a:p>
         </p:txBody>
       </p:sp>
@@ -40301,6 +40949,7 @@
           <a:lstStyle/>
           <a:p>
             <a:pPr algn="ctr"/>
+            <a:endParaRPr/>
           </a:p>
         </p:txBody>
       </p:sp>
@@ -40618,6 +41267,7 @@
           <a:lstStyle/>
           <a:p>
             <a:pPr algn="ctr"/>
+            <a:endParaRPr/>
           </a:p>
         </p:txBody>
       </p:sp>
@@ -40661,6 +41311,7 @@
           <a:lstStyle/>
           <a:p>
             <a:pPr algn="ctr"/>
+            <a:endParaRPr/>
           </a:p>
         </p:txBody>
       </p:sp>
@@ -40944,6 +41595,7 @@
           <a:lstStyle/>
           <a:p>
             <a:pPr algn="ctr"/>
+            <a:endParaRPr/>
           </a:p>
         </p:txBody>
       </p:sp>
